--- a/exam-generator/sp025-exam-generator/c9/files.pptx
+++ b/exam-generator/sp025-exam-generator/c9/files.pptx
@@ -5,12 +5,18 @@
     <p:sldMasterId id="2147483648" r:id="rId1"/>
   </p:sldMasterIdLst>
   <p:notesMasterIdLst>
-    <p:notesMasterId r:id="rId5"/>
+    <p:notesMasterId r:id="rId11"/>
   </p:notesMasterIdLst>
   <p:sldIdLst>
     <p:sldId id="258" r:id="rId2"/>
     <p:sldId id="259" r:id="rId3"/>
     <p:sldId id="260" r:id="rId4"/>
+    <p:sldId id="264" r:id="rId5"/>
+    <p:sldId id="265" r:id="rId6"/>
+    <p:sldId id="271" r:id="rId7"/>
+    <p:sldId id="272" r:id="rId8"/>
+    <p:sldId id="273" r:id="rId9"/>
+    <p:sldId id="274" r:id="rId10"/>
   </p:sldIdLst>
   <p:sldSz cx="12192000" cy="6858000"/>
   <p:notesSz cx="6858000" cy="9144000"/>
@@ -199,7 +205,7 @@
           <a:p>
             <a:fld id="{E930CEF5-4124-458A-8583-FB2A0D68282E}" type="datetimeFigureOut">
               <a:rPr lang="en-MY" smtClean="0"/>
-              <a:t>16/3/2026</a:t>
+              <a:t>16/4/2026</a:t>
             </a:fld>
             <a:endParaRPr lang="en-MY"/>
           </a:p>
@@ -1073,7 +1079,7 @@
           <a:p>
             <a:fld id="{55736931-D21D-4CEE-8596-8652B0B9C773}" type="datetimeFigureOut">
               <a:rPr lang="en-MY" smtClean="0"/>
-              <a:t>16/3/2026</a:t>
+              <a:t>16/4/2026</a:t>
             </a:fld>
             <a:endParaRPr lang="en-MY"/>
           </a:p>
@@ -1273,7 +1279,7 @@
           <a:p>
             <a:fld id="{55736931-D21D-4CEE-8596-8652B0B9C773}" type="datetimeFigureOut">
               <a:rPr lang="en-MY" smtClean="0"/>
-              <a:t>16/3/2026</a:t>
+              <a:t>16/4/2026</a:t>
             </a:fld>
             <a:endParaRPr lang="en-MY"/>
           </a:p>
@@ -1483,7 +1489,7 @@
           <a:p>
             <a:fld id="{55736931-D21D-4CEE-8596-8652B0B9C773}" type="datetimeFigureOut">
               <a:rPr lang="en-MY" smtClean="0"/>
-              <a:t>16/3/2026</a:t>
+              <a:t>16/4/2026</a:t>
             </a:fld>
             <a:endParaRPr lang="en-MY"/>
           </a:p>
@@ -1683,7 +1689,7 @@
           <a:p>
             <a:fld id="{55736931-D21D-4CEE-8596-8652B0B9C773}" type="datetimeFigureOut">
               <a:rPr lang="en-MY" smtClean="0"/>
-              <a:t>16/3/2026</a:t>
+              <a:t>16/4/2026</a:t>
             </a:fld>
             <a:endParaRPr lang="en-MY"/>
           </a:p>
@@ -1959,7 +1965,7 @@
           <a:p>
             <a:fld id="{55736931-D21D-4CEE-8596-8652B0B9C773}" type="datetimeFigureOut">
               <a:rPr lang="en-MY" smtClean="0"/>
-              <a:t>16/3/2026</a:t>
+              <a:t>16/4/2026</a:t>
             </a:fld>
             <a:endParaRPr lang="en-MY"/>
           </a:p>
@@ -2227,7 +2233,7 @@
           <a:p>
             <a:fld id="{55736931-D21D-4CEE-8596-8652B0B9C773}" type="datetimeFigureOut">
               <a:rPr lang="en-MY" smtClean="0"/>
-              <a:t>16/3/2026</a:t>
+              <a:t>16/4/2026</a:t>
             </a:fld>
             <a:endParaRPr lang="en-MY"/>
           </a:p>
@@ -2642,7 +2648,7 @@
           <a:p>
             <a:fld id="{55736931-D21D-4CEE-8596-8652B0B9C773}" type="datetimeFigureOut">
               <a:rPr lang="en-MY" smtClean="0"/>
-              <a:t>16/3/2026</a:t>
+              <a:t>16/4/2026</a:t>
             </a:fld>
             <a:endParaRPr lang="en-MY"/>
           </a:p>
@@ -2784,7 +2790,7 @@
           <a:p>
             <a:fld id="{55736931-D21D-4CEE-8596-8652B0B9C773}" type="datetimeFigureOut">
               <a:rPr lang="en-MY" smtClean="0"/>
-              <a:t>16/3/2026</a:t>
+              <a:t>16/4/2026</a:t>
             </a:fld>
             <a:endParaRPr lang="en-MY"/>
           </a:p>
@@ -2897,7 +2903,7 @@
           <a:p>
             <a:fld id="{55736931-D21D-4CEE-8596-8652B0B9C773}" type="datetimeFigureOut">
               <a:rPr lang="en-MY" smtClean="0"/>
-              <a:t>16/3/2026</a:t>
+              <a:t>16/4/2026</a:t>
             </a:fld>
             <a:endParaRPr lang="en-MY"/>
           </a:p>
@@ -3210,7 +3216,7 @@
           <a:p>
             <a:fld id="{55736931-D21D-4CEE-8596-8652B0B9C773}" type="datetimeFigureOut">
               <a:rPr lang="en-MY" smtClean="0"/>
-              <a:t>16/3/2026</a:t>
+              <a:t>16/4/2026</a:t>
             </a:fld>
             <a:endParaRPr lang="en-MY"/>
           </a:p>
@@ -3499,7 +3505,7 @@
           <a:p>
             <a:fld id="{55736931-D21D-4CEE-8596-8652B0B9C773}" type="datetimeFigureOut">
               <a:rPr lang="en-MY" smtClean="0"/>
-              <a:t>16/3/2026</a:t>
+              <a:t>16/4/2026</a:t>
             </a:fld>
             <a:endParaRPr lang="en-MY"/>
           </a:p>
@@ -3742,7 +3748,7 @@
           <a:p>
             <a:fld id="{55736931-D21D-4CEE-8596-8652B0B9C773}" type="datetimeFigureOut">
               <a:rPr lang="en-MY" smtClean="0"/>
-              <a:t>16/3/2026</a:t>
+              <a:t>16/4/2026</a:t>
             </a:fld>
             <a:endParaRPr lang="en-MY"/>
           </a:p>
@@ -4266,8 +4272,8 @@
           <a:chExt cx="0" cy="0"/>
         </a:xfrm>
       </p:grpSpPr>
-      <mc:AlternateContent xmlns:mc="http://schemas.openxmlformats.org/markup-compatibility/2006">
-        <mc:Choice xmlns:a14="http://schemas.microsoft.com/office/drawing/2010/main" Requires="a14">
+      <mc:AlternateContent xmlns:mc="http://schemas.openxmlformats.org/markup-compatibility/2006" xmlns:a14="http://schemas.microsoft.com/office/drawing/2010/main">
+        <mc:Choice Requires="a14">
           <p:sp>
             <p:nvSpPr>
               <p:cNvPr id="4" name="TextBox 3">
@@ -4390,7 +4396,7 @@
             </p:txBody>
           </p:sp>
         </mc:Choice>
-        <mc:Fallback>
+        <mc:Fallback xmlns="">
           <p:sp>
             <p:nvSpPr>
               <p:cNvPr id="4" name="TextBox 3">
@@ -4575,6 +4581,3152 @@
     <p:extLst>
       <p:ext uri="{BB962C8B-B14F-4D97-AF65-F5344CB8AC3E}">
         <p14:creationId xmlns:p14="http://schemas.microsoft.com/office/powerpoint/2010/main" val="4014564541"/>
+      </p:ext>
+    </p:extLst>
+  </p:cSld>
+  <p:clrMapOvr>
+    <a:masterClrMapping/>
+  </p:clrMapOvr>
+</p:sld>
+</file>
+
+<file path=ppt/slides/slide4.xml><?xml version="1.0" encoding="utf-8"?>
+<p:sld xmlns:a="http://schemas.openxmlformats.org/drawingml/2006/main" xmlns:r="http://schemas.openxmlformats.org/officeDocument/2006/relationships" xmlns:p="http://schemas.openxmlformats.org/presentationml/2006/main">
+  <p:cSld>
+    <p:spTree>
+      <p:nvGrpSpPr>
+        <p:cNvPr id="1" name="">
+          <a:extLst>
+            <a:ext uri="{FF2B5EF4-FFF2-40B4-BE49-F238E27FC236}">
+              <a16:creationId xmlns:a16="http://schemas.microsoft.com/office/drawing/2014/main" id="{17079DA1-22BA-058C-D422-F0D09CDE1429}"/>
+            </a:ext>
+          </a:extLst>
+        </p:cNvPr>
+        <p:cNvGrpSpPr/>
+        <p:nvPr/>
+      </p:nvGrpSpPr>
+      <p:grpSpPr>
+        <a:xfrm>
+          <a:off x="0" y="0"/>
+          <a:ext cx="0" cy="0"/>
+          <a:chOff x="0" y="0"/>
+          <a:chExt cx="0" cy="0"/>
+        </a:xfrm>
+      </p:grpSpPr>
+      <p:sp>
+        <p:nvSpPr>
+          <p:cNvPr id="3" name="TextBox 2">
+            <a:extLst>
+              <a:ext uri="{FF2B5EF4-FFF2-40B4-BE49-F238E27FC236}">
+                <a16:creationId xmlns:a16="http://schemas.microsoft.com/office/drawing/2014/main" id="{7F2C7331-4758-F743-79D6-A9A74BB770AB}"/>
+              </a:ext>
+            </a:extLst>
+          </p:cNvPr>
+          <p:cNvSpPr txBox="1"/>
+          <p:nvPr/>
+        </p:nvSpPr>
+        <p:spPr>
+          <a:xfrm>
+            <a:off x="849086" y="637792"/>
+            <a:ext cx="10972800" cy="923330"/>
+          </a:xfrm>
+          <a:prstGeom prst="rect">
+            <a:avLst/>
+          </a:prstGeom>
+          <a:noFill/>
+        </p:spPr>
+        <p:txBody>
+          <a:bodyPr wrap="square">
+            <a:spAutoFit/>
+          </a:bodyPr>
+          <a:lstStyle/>
+          <a:p>
+            <a:r>
+              <a:rPr lang="en-US" dirty="0">
+                <a:latin typeface="Times New Roman" panose="02020603050405020304" pitchFamily="18" charset="0"/>
+                <a:cs typeface="Times New Roman" panose="02020603050405020304" pitchFamily="18" charset="0"/>
+              </a:rPr>
+              <a:t>9. a) The nuclear mass of Radon, ²²⁶₈₈Rn is 226.02544 u. Determine the mass defect in atomic mass units (u) and kilograms for Radon.</a:t>
+            </a:r>
+          </a:p>
+          <a:p>
+            <a:pPr algn="r"/>
+            <a:r>
+              <a:rPr lang="en-US" dirty="0">
+                <a:latin typeface="Times New Roman" panose="02020603050405020304" pitchFamily="18" charset="0"/>
+                <a:cs typeface="Times New Roman" panose="02020603050405020304" pitchFamily="18" charset="0"/>
+              </a:rPr>
+              <a:t>[2 marks]</a:t>
+            </a:r>
+            <a:endParaRPr lang="en-MY" dirty="0">
+              <a:latin typeface="Times New Roman" panose="02020603050405020304" pitchFamily="18" charset="0"/>
+              <a:cs typeface="Times New Roman" panose="02020603050405020304" pitchFamily="18" charset="0"/>
+            </a:endParaRPr>
+          </a:p>
+        </p:txBody>
+      </p:sp>
+      <p:sp>
+        <p:nvSpPr>
+          <p:cNvPr id="5" name="TextBox 4">
+            <a:extLst>
+              <a:ext uri="{FF2B5EF4-FFF2-40B4-BE49-F238E27FC236}">
+                <a16:creationId xmlns:a16="http://schemas.microsoft.com/office/drawing/2014/main" id="{AA05AB1B-D9EE-A70D-09BF-80C1689CB0BE}"/>
+              </a:ext>
+            </a:extLst>
+          </p:cNvPr>
+          <p:cNvSpPr txBox="1"/>
+          <p:nvPr/>
+        </p:nvSpPr>
+        <p:spPr>
+          <a:xfrm>
+            <a:off x="849086" y="2094637"/>
+            <a:ext cx="10972800" cy="1477328"/>
+          </a:xfrm>
+          <a:prstGeom prst="rect">
+            <a:avLst/>
+          </a:prstGeom>
+          <a:noFill/>
+        </p:spPr>
+        <p:txBody>
+          <a:bodyPr wrap="square">
+            <a:spAutoFit/>
+          </a:bodyPr>
+          <a:lstStyle/>
+          <a:p>
+            <a:pPr>
+              <a:buNone/>
+            </a:pPr>
+            <a:r>
+              <a:rPr lang="en-US" dirty="0">
+                <a:latin typeface="Times New Roman" panose="02020603050405020304" pitchFamily="18" charset="0"/>
+                <a:cs typeface="Times New Roman" panose="02020603050405020304" pitchFamily="18" charset="0"/>
+              </a:rPr>
+              <a:t>b) A sample of uranium-238 contains 2.5 × 10²³ atoms. Given that the half-life of uranium-238 is 1.42 × 10¹⁷ s, calculate:</a:t>
+            </a:r>
+          </a:p>
+          <a:p>
+            <a:pPr marL="400050" indent="-400050">
+              <a:buAutoNum type="romanLcParenR"/>
+            </a:pPr>
+            <a:r>
+              <a:rPr lang="en-US" dirty="0">
+                <a:latin typeface="Times New Roman" panose="02020603050405020304" pitchFamily="18" charset="0"/>
+                <a:cs typeface="Times New Roman" panose="02020603050405020304" pitchFamily="18" charset="0"/>
+              </a:rPr>
+              <a:t>the initial activity of the sample in Becquerel. </a:t>
+            </a:r>
+          </a:p>
+          <a:p>
+            <a:pPr marL="400050" indent="-400050">
+              <a:buAutoNum type="romanLcParenR"/>
+            </a:pPr>
+            <a:r>
+              <a:rPr lang="en-US" dirty="0">
+                <a:latin typeface="Times New Roman" panose="02020603050405020304" pitchFamily="18" charset="0"/>
+                <a:cs typeface="Times New Roman" panose="02020603050405020304" pitchFamily="18" charset="0"/>
+              </a:rPr>
+              <a:t>the number of uranium-238 atoms remaining after 3 × 10¹⁸ s.</a:t>
+            </a:r>
+          </a:p>
+          <a:p>
+            <a:pPr algn="r">
+              <a:buNone/>
+            </a:pPr>
+            <a:r>
+              <a:rPr lang="en-US" dirty="0">
+                <a:latin typeface="Times New Roman" panose="02020603050405020304" pitchFamily="18" charset="0"/>
+                <a:cs typeface="Times New Roman" panose="02020603050405020304" pitchFamily="18" charset="0"/>
+              </a:rPr>
+              <a:t>[5 marks]</a:t>
+            </a:r>
+          </a:p>
+        </p:txBody>
+      </p:sp>
+      <p:pic>
+        <p:nvPicPr>
+          <p:cNvPr id="7" name="Picture 6">
+            <a:extLst>
+              <a:ext uri="{FF2B5EF4-FFF2-40B4-BE49-F238E27FC236}">
+                <a16:creationId xmlns:a16="http://schemas.microsoft.com/office/drawing/2014/main" id="{F56CEECA-C0F3-5744-C08A-041901759314}"/>
+              </a:ext>
+            </a:extLst>
+          </p:cNvPr>
+          <p:cNvPicPr>
+            <a:picLocks noChangeAspect="1"/>
+          </p:cNvPicPr>
+          <p:nvPr/>
+        </p:nvPicPr>
+        <p:blipFill>
+          <a:blip r:embed="rId2"/>
+          <a:stretch>
+            <a:fillRect/>
+          </a:stretch>
+        </p:blipFill>
+        <p:spPr>
+          <a:xfrm>
+            <a:off x="7137969" y="5853444"/>
+            <a:ext cx="4839375" cy="733527"/>
+          </a:xfrm>
+          <a:prstGeom prst="rect">
+            <a:avLst/>
+          </a:prstGeom>
+        </p:spPr>
+      </p:pic>
+    </p:spTree>
+    <p:extLst>
+      <p:ext uri="{BB962C8B-B14F-4D97-AF65-F5344CB8AC3E}">
+        <p14:creationId xmlns:p14="http://schemas.microsoft.com/office/powerpoint/2010/main" val="672412196"/>
+      </p:ext>
+    </p:extLst>
+  </p:cSld>
+  <p:clrMapOvr>
+    <a:masterClrMapping/>
+  </p:clrMapOvr>
+</p:sld>
+</file>
+
+<file path=ppt/slides/slide5.xml><?xml version="1.0" encoding="utf-8"?>
+<p:sld xmlns:a="http://schemas.openxmlformats.org/drawingml/2006/main" xmlns:r="http://schemas.openxmlformats.org/officeDocument/2006/relationships" xmlns:p="http://schemas.openxmlformats.org/presentationml/2006/main">
+  <p:cSld>
+    <p:spTree>
+      <p:nvGrpSpPr>
+        <p:cNvPr id="1" name="">
+          <a:extLst>
+            <a:ext uri="{FF2B5EF4-FFF2-40B4-BE49-F238E27FC236}">
+              <a16:creationId xmlns:a16="http://schemas.microsoft.com/office/drawing/2014/main" id="{A1480A6F-2486-61B2-9031-8D4F69343561}"/>
+            </a:ext>
+          </a:extLst>
+        </p:cNvPr>
+        <p:cNvGrpSpPr/>
+        <p:nvPr/>
+      </p:nvGrpSpPr>
+      <p:grpSpPr>
+        <a:xfrm>
+          <a:off x="0" y="0"/>
+          <a:ext cx="0" cy="0"/>
+          <a:chOff x="0" y="0"/>
+          <a:chExt cx="0" cy="0"/>
+        </a:xfrm>
+      </p:grpSpPr>
+      <mc:AlternateContent xmlns:mc="http://schemas.openxmlformats.org/markup-compatibility/2006" xmlns:a14="http://schemas.microsoft.com/office/drawing/2010/main">
+        <mc:Choice Requires="a14">
+          <p:sp>
+            <p:nvSpPr>
+              <p:cNvPr id="4" name="TextBox 3">
+                <a:extLst>
+                  <a:ext uri="{FF2B5EF4-FFF2-40B4-BE49-F238E27FC236}">
+                    <a16:creationId xmlns:a16="http://schemas.microsoft.com/office/drawing/2014/main" id="{C69CB63D-8299-565F-535A-91F5E2CB979B}"/>
+                  </a:ext>
+                </a:extLst>
+              </p:cNvPr>
+              <p:cNvSpPr txBox="1"/>
+              <p:nvPr/>
+            </p:nvSpPr>
+            <p:spPr>
+              <a:xfrm>
+                <a:off x="963827" y="1013254"/>
+                <a:ext cx="10478530" cy="930191"/>
+              </a:xfrm>
+              <a:prstGeom prst="rect">
+                <a:avLst/>
+              </a:prstGeom>
+              <a:noFill/>
+            </p:spPr>
+            <p:txBody>
+              <a:bodyPr wrap="square" rtlCol="0">
+                <a:spAutoFit/>
+              </a:bodyPr>
+              <a:lstStyle/>
+              <a:p>
+                <a14:m>
+                  <m:oMath xmlns:m="http://schemas.openxmlformats.org/officeDocument/2006/math">
+                    <m:r>
+                      <a:rPr lang="en-US" b="0" i="1" smtClean="0">
+                        <a:latin typeface="Cambria Math" panose="02040503050406030204" pitchFamily="18" charset="0"/>
+                      </a:rPr>
+                      <m:t>9. </m:t>
+                    </m:r>
+                    <m:r>
+                      <a:rPr lang="en-US" b="0" i="1" smtClean="0">
+                        <a:latin typeface="Cambria Math" panose="02040503050406030204" pitchFamily="18" charset="0"/>
+                      </a:rPr>
+                      <m:t>𝑎</m:t>
+                    </m:r>
+                    <m:r>
+                      <a:rPr lang="en-US" b="0" i="1" smtClean="0">
+                        <a:latin typeface="Cambria Math" panose="02040503050406030204" pitchFamily="18" charset="0"/>
+                      </a:rPr>
+                      <m:t>) </m:t>
+                    </m:r>
+                    <m:sPre>
+                      <m:sPrePr>
+                        <m:ctrlPr>
+                          <a:rPr lang="en-MY" i="1" smtClean="0">
+                            <a:latin typeface="Cambria Math" panose="02040503050406030204" pitchFamily="18" charset="0"/>
+                          </a:rPr>
+                        </m:ctrlPr>
+                      </m:sPrePr>
+                      <m:sub>
+                        <m:r>
+                          <a:rPr lang="en-US" b="0" i="1" smtClean="0">
+                            <a:latin typeface="Cambria Math" panose="02040503050406030204" pitchFamily="18" charset="0"/>
+                          </a:rPr>
+                          <m:t>90</m:t>
+                        </m:r>
+                      </m:sub>
+                      <m:sup>
+                        <m:r>
+                          <a:rPr lang="en-US" b="0" i="1" smtClean="0">
+                            <a:latin typeface="Cambria Math" panose="02040503050406030204" pitchFamily="18" charset="0"/>
+                          </a:rPr>
+                          <m:t>234</m:t>
+                        </m:r>
+                      </m:sup>
+                      <m:e>
+                        <m:r>
+                          <a:rPr lang="en-US" b="0" i="1" smtClean="0">
+                            <a:latin typeface="Cambria Math" panose="02040503050406030204" pitchFamily="18" charset="0"/>
+                          </a:rPr>
+                          <m:t>𝑇h</m:t>
+                        </m:r>
+                      </m:e>
+                    </m:sPre>
+                  </m:oMath>
+                </a14:m>
+                <a:r>
+                  <a:rPr lang="en-MY" dirty="0">
+                    <a:latin typeface="Times New Roman" panose="02020603050405020304" pitchFamily="18" charset="0"/>
+                    <a:cs typeface="Times New Roman" panose="02020603050405020304" pitchFamily="18" charset="0"/>
+                  </a:rPr>
+                  <a:t> element decays by emitting beta particle negative producing a new element K. Write an equation for this reaction.</a:t>
+                </a:r>
+              </a:p>
+              <a:p>
+                <a:pPr algn="r"/>
+                <a:r>
+                  <a:rPr lang="en-MY" dirty="0">
+                    <a:latin typeface="Times New Roman" panose="02020603050405020304" pitchFamily="18" charset="0"/>
+                    <a:cs typeface="Times New Roman" panose="02020603050405020304" pitchFamily="18" charset="0"/>
+                  </a:rPr>
+                  <a:t>[2 mark]</a:t>
+                </a:r>
+              </a:p>
+            </p:txBody>
+          </p:sp>
+        </mc:Choice>
+        <mc:Fallback xmlns="">
+          <p:sp>
+            <p:nvSpPr>
+              <p:cNvPr id="4" name="TextBox 3">
+                <a:extLst>
+                  <a:ext uri="{FF2B5EF4-FFF2-40B4-BE49-F238E27FC236}">
+                    <a16:creationId xmlns:a16="http://schemas.microsoft.com/office/drawing/2014/main" id="{C69CB63D-8299-565F-535A-91F5E2CB979B}"/>
+                  </a:ext>
+                </a:extLst>
+              </p:cNvPr>
+              <p:cNvSpPr txBox="1">
+                <a:spLocks noRot="1" noChangeAspect="1" noMove="1" noResize="1" noEditPoints="1" noAdjustHandles="1" noChangeArrowheads="1" noChangeShapeType="1" noTextEdit="1"/>
+              </p:cNvSpPr>
+              <p:nvPr/>
+            </p:nvSpPr>
+            <p:spPr>
+              <a:xfrm>
+                <a:off x="963827" y="1013254"/>
+                <a:ext cx="10478530" cy="930191"/>
+              </a:xfrm>
+              <a:prstGeom prst="rect">
+                <a:avLst/>
+              </a:prstGeom>
+              <a:blipFill>
+                <a:blip r:embed="rId2"/>
+                <a:stretch>
+                  <a:fillRect l="-465" t="-2614" r="-989" b="-9150"/>
+                </a:stretch>
+              </a:blipFill>
+            </p:spPr>
+            <p:txBody>
+              <a:bodyPr/>
+              <a:lstStyle/>
+              <a:p>
+                <a:r>
+                  <a:rPr lang="en-MY">
+                    <a:noFill/>
+                  </a:rPr>
+                  <a:t> </a:t>
+                </a:r>
+              </a:p>
+            </p:txBody>
+          </p:sp>
+        </mc:Fallback>
+      </mc:AlternateContent>
+      <p:sp>
+        <p:nvSpPr>
+          <p:cNvPr id="6" name="TextBox 5">
+            <a:extLst>
+              <a:ext uri="{FF2B5EF4-FFF2-40B4-BE49-F238E27FC236}">
+                <a16:creationId xmlns:a16="http://schemas.microsoft.com/office/drawing/2014/main" id="{6E7E5F04-4427-F6E7-0204-24564AB26D28}"/>
+              </a:ext>
+            </a:extLst>
+          </p:cNvPr>
+          <p:cNvSpPr txBox="1"/>
+          <p:nvPr/>
+        </p:nvSpPr>
+        <p:spPr>
+          <a:xfrm>
+            <a:off x="963827" y="2147595"/>
+            <a:ext cx="10478530" cy="1200329"/>
+          </a:xfrm>
+          <a:prstGeom prst="rect">
+            <a:avLst/>
+          </a:prstGeom>
+          <a:noFill/>
+        </p:spPr>
+        <p:txBody>
+          <a:bodyPr wrap="square" rtlCol="0">
+            <a:spAutoFit/>
+          </a:bodyPr>
+          <a:lstStyle/>
+          <a:p>
+            <a:r>
+              <a:rPr lang="en-US" dirty="0">
+                <a:latin typeface="Times New Roman" panose="02020603050405020304" pitchFamily="18" charset="0"/>
+                <a:cs typeface="Times New Roman" panose="02020603050405020304" pitchFamily="18" charset="0"/>
+              </a:rPr>
+              <a:t>b) After a plant or animal dies, its Carbon-14 content decreases with a half-life of 5730 year. If an archaeologist finds an ancient fire pit containing partially consumed firewood and the Carbon-14 content of the wood is only 12.5% that of an equal carbon sample from a present-day tree, calculate the age of the ancient site.</a:t>
+            </a:r>
+          </a:p>
+          <a:p>
+            <a:pPr algn="r"/>
+            <a:r>
+              <a:rPr lang="en-US" dirty="0">
+                <a:latin typeface="Times New Roman" panose="02020603050405020304" pitchFamily="18" charset="0"/>
+                <a:cs typeface="Times New Roman" panose="02020603050405020304" pitchFamily="18" charset="0"/>
+              </a:rPr>
+              <a:t>[5 marks]</a:t>
+            </a:r>
+            <a:endParaRPr lang="en-MY" dirty="0">
+              <a:latin typeface="Times New Roman" panose="02020603050405020304" pitchFamily="18" charset="0"/>
+              <a:cs typeface="Times New Roman" panose="02020603050405020304" pitchFamily="18" charset="0"/>
+            </a:endParaRPr>
+          </a:p>
+        </p:txBody>
+      </p:sp>
+      <p:pic>
+        <p:nvPicPr>
+          <p:cNvPr id="8" name="Picture 7">
+            <a:extLst>
+              <a:ext uri="{FF2B5EF4-FFF2-40B4-BE49-F238E27FC236}">
+                <a16:creationId xmlns:a16="http://schemas.microsoft.com/office/drawing/2014/main" id="{888DE4E2-523F-6C1E-C3E3-60FF11102E6C}"/>
+              </a:ext>
+            </a:extLst>
+          </p:cNvPr>
+          <p:cNvPicPr>
+            <a:picLocks noChangeAspect="1"/>
+          </p:cNvPicPr>
+          <p:nvPr/>
+        </p:nvPicPr>
+        <p:blipFill>
+          <a:blip r:embed="rId3"/>
+          <a:stretch>
+            <a:fillRect/>
+          </a:stretch>
+        </p:blipFill>
+        <p:spPr>
+          <a:xfrm>
+            <a:off x="7343462" y="6072155"/>
+            <a:ext cx="4477375" cy="466790"/>
+          </a:xfrm>
+          <a:prstGeom prst="rect">
+            <a:avLst/>
+          </a:prstGeom>
+        </p:spPr>
+      </p:pic>
+    </p:spTree>
+    <p:extLst>
+      <p:ext uri="{BB962C8B-B14F-4D97-AF65-F5344CB8AC3E}">
+        <p14:creationId xmlns:p14="http://schemas.microsoft.com/office/powerpoint/2010/main" val="1924120129"/>
+      </p:ext>
+    </p:extLst>
+  </p:cSld>
+  <p:clrMapOvr>
+    <a:masterClrMapping/>
+  </p:clrMapOvr>
+</p:sld>
+</file>
+
+<file path=ppt/slides/slide6.xml><?xml version="1.0" encoding="utf-8"?>
+<p:sld xmlns:a="http://schemas.openxmlformats.org/drawingml/2006/main" xmlns:r="http://schemas.openxmlformats.org/officeDocument/2006/relationships" xmlns:p="http://schemas.openxmlformats.org/presentationml/2006/main">
+  <p:cSld>
+    <p:spTree>
+      <p:nvGrpSpPr>
+        <p:cNvPr id="1" name="">
+          <a:extLst>
+            <a:ext uri="{FF2B5EF4-FFF2-40B4-BE49-F238E27FC236}">
+              <a16:creationId xmlns:a16="http://schemas.microsoft.com/office/drawing/2014/main" id="{A51701B4-1E77-0370-A7D2-D5861F20E322}"/>
+            </a:ext>
+          </a:extLst>
+        </p:cNvPr>
+        <p:cNvGrpSpPr/>
+        <p:nvPr/>
+      </p:nvGrpSpPr>
+      <p:grpSpPr>
+        <a:xfrm>
+          <a:off x="0" y="0"/>
+          <a:ext cx="0" cy="0"/>
+          <a:chOff x="0" y="0"/>
+          <a:chExt cx="0" cy="0"/>
+        </a:xfrm>
+      </p:grpSpPr>
+      <p:sp>
+        <p:nvSpPr>
+          <p:cNvPr id="3" name="TextBox 2">
+            <a:extLst>
+              <a:ext uri="{FF2B5EF4-FFF2-40B4-BE49-F238E27FC236}">
+                <a16:creationId xmlns:a16="http://schemas.microsoft.com/office/drawing/2014/main" id="{8681B890-F142-818B-4EF5-51063E6B7B83}"/>
+              </a:ext>
+            </a:extLst>
+          </p:cNvPr>
+          <p:cNvSpPr txBox="1"/>
+          <p:nvPr/>
+        </p:nvSpPr>
+        <p:spPr>
+          <a:xfrm>
+            <a:off x="788068" y="651393"/>
+            <a:ext cx="10978816" cy="646331"/>
+          </a:xfrm>
+          <a:prstGeom prst="rect">
+            <a:avLst/>
+          </a:prstGeom>
+          <a:noFill/>
+        </p:spPr>
+        <p:txBody>
+          <a:bodyPr wrap="square">
+            <a:spAutoFit/>
+          </a:bodyPr>
+          <a:lstStyle/>
+          <a:p>
+            <a:r>
+              <a:rPr lang="en-US" b="1" dirty="0">
+                <a:latin typeface="Times New Roman" panose="02020603050405020304" pitchFamily="18" charset="0"/>
+                <a:cs typeface="Times New Roman" panose="02020603050405020304" pitchFamily="18" charset="0"/>
+              </a:rPr>
+              <a:t>9. a) </a:t>
+            </a:r>
+            <a:r>
+              <a:rPr lang="en-US" dirty="0">
+                <a:latin typeface="Times New Roman" panose="02020603050405020304" pitchFamily="18" charset="0"/>
+                <a:cs typeface="Times New Roman" panose="02020603050405020304" pitchFamily="18" charset="0"/>
+              </a:rPr>
+              <a:t>The mass of ⁶³₂₉Cu nucleus is 62.5219u. Calculate the binding energy per nucleon of ⁶³₂₉Cu nucleus. </a:t>
+            </a:r>
+          </a:p>
+          <a:p>
+            <a:pPr algn="r"/>
+            <a:r>
+              <a:rPr lang="en-US" dirty="0">
+                <a:latin typeface="Times New Roman" panose="02020603050405020304" pitchFamily="18" charset="0"/>
+                <a:cs typeface="Times New Roman" panose="02020603050405020304" pitchFamily="18" charset="0"/>
+              </a:rPr>
+              <a:t>[3 marks]</a:t>
+            </a:r>
+            <a:endParaRPr lang="en-MY" dirty="0">
+              <a:latin typeface="Times New Roman" panose="02020603050405020304" pitchFamily="18" charset="0"/>
+              <a:cs typeface="Times New Roman" panose="02020603050405020304" pitchFamily="18" charset="0"/>
+            </a:endParaRPr>
+          </a:p>
+        </p:txBody>
+      </p:sp>
+      <p:sp>
+        <p:nvSpPr>
+          <p:cNvPr id="5" name="TextBox 4">
+            <a:extLst>
+              <a:ext uri="{FF2B5EF4-FFF2-40B4-BE49-F238E27FC236}">
+                <a16:creationId xmlns:a16="http://schemas.microsoft.com/office/drawing/2014/main" id="{601B2CBE-95A3-F35A-1187-BED3DC27D16E}"/>
+              </a:ext>
+            </a:extLst>
+          </p:cNvPr>
+          <p:cNvSpPr txBox="1"/>
+          <p:nvPr/>
+        </p:nvSpPr>
+        <p:spPr>
+          <a:xfrm>
+            <a:off x="788068" y="1521650"/>
+            <a:ext cx="10978816" cy="1200329"/>
+          </a:xfrm>
+          <a:prstGeom prst="rect">
+            <a:avLst/>
+          </a:prstGeom>
+          <a:noFill/>
+        </p:spPr>
+        <p:txBody>
+          <a:bodyPr wrap="square">
+            <a:spAutoFit/>
+          </a:bodyPr>
+          <a:lstStyle/>
+          <a:p>
+            <a:r>
+              <a:rPr lang="en-US" b="1" dirty="0">
+                <a:latin typeface="Times New Roman" panose="02020603050405020304" pitchFamily="18" charset="0"/>
+                <a:cs typeface="Times New Roman" panose="02020603050405020304" pitchFamily="18" charset="0"/>
+              </a:rPr>
+              <a:t>b)</a:t>
+            </a:r>
+            <a:r>
+              <a:rPr lang="en-US" dirty="0">
+                <a:latin typeface="Times New Roman" panose="02020603050405020304" pitchFamily="18" charset="0"/>
+                <a:cs typeface="Times New Roman" panose="02020603050405020304" pitchFamily="18" charset="0"/>
+              </a:rPr>
+              <a:t> A radioactive source contains 1 × 10⁻⁶ g  ²³⁹Pu. If this source contains 2300 alpha particles per second, calculate:</a:t>
+            </a:r>
+          </a:p>
+          <a:p>
+            <a:r>
+              <a:rPr lang="en-US" dirty="0">
+                <a:latin typeface="Times New Roman" panose="02020603050405020304" pitchFamily="18" charset="0"/>
+                <a:cs typeface="Times New Roman" panose="02020603050405020304" pitchFamily="18" charset="0"/>
+              </a:rPr>
+              <a:t> </a:t>
+            </a:r>
+            <a:r>
+              <a:rPr lang="en-US" dirty="0" err="1">
+                <a:latin typeface="Times New Roman" panose="02020603050405020304" pitchFamily="18" charset="0"/>
+                <a:cs typeface="Times New Roman" panose="02020603050405020304" pitchFamily="18" charset="0"/>
+              </a:rPr>
+              <a:t>i</a:t>
+            </a:r>
+            <a:r>
+              <a:rPr lang="en-US" dirty="0">
+                <a:latin typeface="Times New Roman" panose="02020603050405020304" pitchFamily="18" charset="0"/>
+                <a:cs typeface="Times New Roman" panose="02020603050405020304" pitchFamily="18" charset="0"/>
+              </a:rPr>
+              <a:t>) its decay constant. </a:t>
+            </a:r>
+          </a:p>
+          <a:p>
+            <a:r>
+              <a:rPr lang="en-US" dirty="0">
+                <a:latin typeface="Times New Roman" panose="02020603050405020304" pitchFamily="18" charset="0"/>
+                <a:cs typeface="Times New Roman" panose="02020603050405020304" pitchFamily="18" charset="0"/>
+              </a:rPr>
+              <a:t>ii) the time required for the source so that its activity decreases to one decay per second.</a:t>
+            </a:r>
+          </a:p>
+          <a:p>
+            <a:pPr algn="r"/>
+            <a:r>
+              <a:rPr lang="en-US" dirty="0">
+                <a:latin typeface="Times New Roman" panose="02020603050405020304" pitchFamily="18" charset="0"/>
+                <a:cs typeface="Times New Roman" panose="02020603050405020304" pitchFamily="18" charset="0"/>
+              </a:rPr>
+              <a:t> [3 marks]</a:t>
+            </a:r>
+            <a:endParaRPr lang="en-MY" dirty="0">
+              <a:latin typeface="Times New Roman" panose="02020603050405020304" pitchFamily="18" charset="0"/>
+              <a:cs typeface="Times New Roman" panose="02020603050405020304" pitchFamily="18" charset="0"/>
+            </a:endParaRPr>
+          </a:p>
+        </p:txBody>
+      </p:sp>
+      <p:pic>
+        <p:nvPicPr>
+          <p:cNvPr id="4" name="Picture 3">
+            <a:extLst>
+              <a:ext uri="{FF2B5EF4-FFF2-40B4-BE49-F238E27FC236}">
+                <a16:creationId xmlns:a16="http://schemas.microsoft.com/office/drawing/2014/main" id="{E1B46B7F-98DD-7C5F-26C5-355FEE6664A0}"/>
+              </a:ext>
+            </a:extLst>
+          </p:cNvPr>
+          <p:cNvPicPr>
+            <a:picLocks noChangeAspect="1"/>
+          </p:cNvPicPr>
+          <p:nvPr/>
+        </p:nvPicPr>
+        <p:blipFill>
+          <a:blip r:embed="rId2"/>
+          <a:stretch>
+            <a:fillRect/>
+          </a:stretch>
+        </p:blipFill>
+        <p:spPr>
+          <a:xfrm>
+            <a:off x="9248364" y="6206607"/>
+            <a:ext cx="2943636" cy="533474"/>
+          </a:xfrm>
+          <a:prstGeom prst="rect">
+            <a:avLst/>
+          </a:prstGeom>
+        </p:spPr>
+      </p:pic>
+    </p:spTree>
+    <p:extLst>
+      <p:ext uri="{BB962C8B-B14F-4D97-AF65-F5344CB8AC3E}">
+        <p14:creationId xmlns:p14="http://schemas.microsoft.com/office/powerpoint/2010/main" val="2715228495"/>
+      </p:ext>
+    </p:extLst>
+  </p:cSld>
+  <p:clrMapOvr>
+    <a:masterClrMapping/>
+  </p:clrMapOvr>
+</p:sld>
+</file>
+
+<file path=ppt/slides/slide7.xml><?xml version="1.0" encoding="utf-8"?>
+<p:sld xmlns:a="http://schemas.openxmlformats.org/drawingml/2006/main" xmlns:r="http://schemas.openxmlformats.org/officeDocument/2006/relationships" xmlns:p="http://schemas.openxmlformats.org/presentationml/2006/main">
+  <p:cSld>
+    <p:spTree>
+      <p:nvGrpSpPr>
+        <p:cNvPr id="1" name=""/>
+        <p:cNvGrpSpPr/>
+        <p:nvPr/>
+      </p:nvGrpSpPr>
+      <p:grpSpPr>
+        <a:xfrm>
+          <a:off x="0" y="0"/>
+          <a:ext cx="0" cy="0"/>
+          <a:chOff x="0" y="0"/>
+          <a:chExt cx="0" cy="0"/>
+        </a:xfrm>
+      </p:grpSpPr>
+      <mc:AlternateContent xmlns:mc="http://schemas.openxmlformats.org/markup-compatibility/2006" xmlns:a14="http://schemas.microsoft.com/office/drawing/2010/main">
+        <mc:Choice Requires="a14">
+          <p:sp>
+            <p:nvSpPr>
+              <p:cNvPr id="3" name="TextBox 2">
+                <a:extLst>
+                  <a:ext uri="{FF2B5EF4-FFF2-40B4-BE49-F238E27FC236}">
+                    <a16:creationId xmlns:a16="http://schemas.microsoft.com/office/drawing/2014/main" id="{56479A75-1FF9-D232-013E-A3013F892F56}"/>
+                  </a:ext>
+                </a:extLst>
+              </p:cNvPr>
+              <p:cNvSpPr txBox="1"/>
+              <p:nvPr/>
+            </p:nvSpPr>
+            <p:spPr>
+              <a:xfrm>
+                <a:off x="589937" y="408483"/>
+                <a:ext cx="10692580" cy="2588722"/>
+              </a:xfrm>
+              <a:prstGeom prst="rect">
+                <a:avLst/>
+              </a:prstGeom>
+              <a:noFill/>
+            </p:spPr>
+            <p:txBody>
+              <a:bodyPr wrap="square">
+                <a:spAutoFit/>
+              </a:bodyPr>
+              <a:lstStyle/>
+              <a:p>
+                <a:pPr lvl="0">
+                  <a:tabLst>
+                    <a:tab pos="561975" algn="l"/>
+                    <a:tab pos="1003935" algn="l"/>
+                  </a:tabLst>
+                </a:pPr>
+                <a:r>
+                  <a:rPr lang="en-US" spc="-25" dirty="0">
+                    <a:latin typeface="Times New Roman" panose="02020603050405020304" pitchFamily="18" charset="0"/>
+                    <a:ea typeface="Times New Roman" panose="02020603050405020304" pitchFamily="18" charset="0"/>
+                  </a:rPr>
+                  <a:t>9</a:t>
+                </a:r>
+                <a:r>
+                  <a:rPr lang="en-US" spc="-25" dirty="0">
+                    <a:effectLst/>
+                    <a:latin typeface="Times New Roman" panose="02020603050405020304" pitchFamily="18" charset="0"/>
+                    <a:ea typeface="Times New Roman" panose="02020603050405020304" pitchFamily="18" charset="0"/>
+                  </a:rPr>
+                  <a:t>(a)</a:t>
+                </a:r>
+                <a:r>
+                  <a:rPr lang="en-US" spc="0" dirty="0">
+                    <a:effectLst/>
+                    <a:latin typeface="Times New Roman" panose="02020603050405020304" pitchFamily="18" charset="0"/>
+                    <a:ea typeface="Times New Roman" panose="02020603050405020304" pitchFamily="18" charset="0"/>
+                  </a:rPr>
+                  <a:t>	An isotope of</a:t>
+                </a:r>
+                <a:r>
+                  <a:rPr lang="en-US" spc="40" dirty="0">
+                    <a:effectLst/>
+                    <a:latin typeface="Times New Roman" panose="02020603050405020304" pitchFamily="18" charset="0"/>
+                    <a:ea typeface="Times New Roman" panose="02020603050405020304" pitchFamily="18" charset="0"/>
+                  </a:rPr>
+                  <a:t> </a:t>
+                </a:r>
+                <a14:m>
+                  <m:oMath xmlns:m="http://schemas.openxmlformats.org/officeDocument/2006/math">
+                    <m:sPre>
+                      <m:sPrePr>
+                        <m:ctrlPr>
+                          <a:rPr lang="en-MY" i="1" spc="40">
+                            <a:effectLst/>
+                            <a:latin typeface="Cambria Math" panose="02040503050406030204" pitchFamily="18" charset="0"/>
+                            <a:ea typeface="Times New Roman" panose="02020603050405020304" pitchFamily="18" charset="0"/>
+                          </a:rPr>
+                        </m:ctrlPr>
+                      </m:sPrePr>
+                      <m:sub>
+                        <m:r>
+                          <a:rPr lang="en-US" i="1" spc="40">
+                            <a:effectLst/>
+                            <a:latin typeface="Cambria Math" panose="02040503050406030204" pitchFamily="18" charset="0"/>
+                            <a:ea typeface="Times New Roman" panose="02020603050405020304" pitchFamily="18" charset="0"/>
+                          </a:rPr>
+                          <m:t>64</m:t>
+                        </m:r>
+                      </m:sub>
+                      <m:sup>
+                        <m:r>
+                          <a:rPr lang="en-US" i="1" spc="40">
+                            <a:effectLst/>
+                            <a:latin typeface="Cambria Math" panose="02040503050406030204" pitchFamily="18" charset="0"/>
+                            <a:ea typeface="Times New Roman" panose="02020603050405020304" pitchFamily="18" charset="0"/>
+                          </a:rPr>
+                          <m:t>151</m:t>
+                        </m:r>
+                      </m:sup>
+                      <m:e>
+                        <m:r>
+                          <a:rPr lang="en-US" i="1" spc="40">
+                            <a:effectLst/>
+                            <a:latin typeface="Cambria Math" panose="02040503050406030204" pitchFamily="18" charset="0"/>
+                            <a:ea typeface="Times New Roman" panose="02020603050405020304" pitchFamily="18" charset="0"/>
+                          </a:rPr>
+                          <m:t>𝐺𝑑</m:t>
+                        </m:r>
+                      </m:e>
+                    </m:sPre>
+                  </m:oMath>
+                </a14:m>
+                <a:r>
+                  <a:rPr lang="en-US" spc="80" dirty="0">
+                    <a:effectLst/>
+                    <a:latin typeface="Cambria Math" panose="02040503050406030204" pitchFamily="18" charset="0"/>
+                    <a:ea typeface="Cambria Math" panose="02040503050406030204" pitchFamily="18" charset="0"/>
+                  </a:rPr>
+                  <a:t> </a:t>
+                </a:r>
+                <a:r>
+                  <a:rPr lang="en-US" spc="0" dirty="0">
+                    <a:effectLst/>
+                    <a:latin typeface="Times New Roman" panose="02020603050405020304" pitchFamily="18" charset="0"/>
+                    <a:ea typeface="Times New Roman" panose="02020603050405020304" pitchFamily="18" charset="0"/>
+                  </a:rPr>
+                  <a:t>(Gadolinium)</a:t>
+                </a:r>
+                <a:r>
+                  <a:rPr lang="en-US" spc="5" dirty="0">
+                    <a:effectLst/>
+                    <a:latin typeface="Times New Roman" panose="02020603050405020304" pitchFamily="18" charset="0"/>
+                    <a:ea typeface="Times New Roman" panose="02020603050405020304" pitchFamily="18" charset="0"/>
+                  </a:rPr>
+                  <a:t> </a:t>
+                </a:r>
+                <a:r>
+                  <a:rPr lang="en-US" spc="0" dirty="0">
+                    <a:effectLst/>
+                    <a:latin typeface="Times New Roman" panose="02020603050405020304" pitchFamily="18" charset="0"/>
+                    <a:ea typeface="Times New Roman" panose="02020603050405020304" pitchFamily="18" charset="0"/>
+                  </a:rPr>
+                  <a:t>has</a:t>
+                </a:r>
+                <a:r>
+                  <a:rPr lang="en-US" spc="5" dirty="0">
+                    <a:effectLst/>
+                    <a:latin typeface="Times New Roman" panose="02020603050405020304" pitchFamily="18" charset="0"/>
+                    <a:ea typeface="Times New Roman" panose="02020603050405020304" pitchFamily="18" charset="0"/>
+                  </a:rPr>
+                  <a:t> </a:t>
+                </a:r>
+                <a:r>
+                  <a:rPr lang="en-US" spc="0" dirty="0">
+                    <a:effectLst/>
+                    <a:latin typeface="Times New Roman" panose="02020603050405020304" pitchFamily="18" charset="0"/>
+                    <a:ea typeface="Times New Roman" panose="02020603050405020304" pitchFamily="18" charset="0"/>
+                  </a:rPr>
+                  <a:t>a nucleus mass</a:t>
+                </a:r>
+                <a:r>
+                  <a:rPr lang="en-US" spc="5" dirty="0">
+                    <a:effectLst/>
+                    <a:latin typeface="Times New Roman" panose="02020603050405020304" pitchFamily="18" charset="0"/>
+                    <a:ea typeface="Times New Roman" panose="02020603050405020304" pitchFamily="18" charset="0"/>
+                  </a:rPr>
+                  <a:t> </a:t>
+                </a:r>
+                <a:r>
+                  <a:rPr lang="en-US" spc="0" dirty="0">
+                    <a:effectLst/>
+                    <a:latin typeface="Times New Roman" panose="02020603050405020304" pitchFamily="18" charset="0"/>
+                    <a:ea typeface="Times New Roman" panose="02020603050405020304" pitchFamily="18" charset="0"/>
+                  </a:rPr>
+                  <a:t>151.919803</a:t>
+                </a:r>
+                <a:r>
+                  <a:rPr lang="en-US" spc="5" dirty="0">
+                    <a:effectLst/>
+                    <a:latin typeface="Times New Roman" panose="02020603050405020304" pitchFamily="18" charset="0"/>
+                    <a:ea typeface="Times New Roman" panose="02020603050405020304" pitchFamily="18" charset="0"/>
+                  </a:rPr>
+                  <a:t> </a:t>
+                </a:r>
+                <a:r>
+                  <a:rPr lang="en-US" spc="0" dirty="0">
+                    <a:effectLst/>
+                    <a:latin typeface="Times New Roman" panose="02020603050405020304" pitchFamily="18" charset="0"/>
+                    <a:ea typeface="Times New Roman" panose="02020603050405020304" pitchFamily="18" charset="0"/>
+                  </a:rPr>
+                  <a:t>u.</a:t>
+                </a:r>
+                <a:r>
+                  <a:rPr lang="en-US" spc="10" dirty="0">
+                    <a:effectLst/>
+                    <a:latin typeface="Times New Roman" panose="02020603050405020304" pitchFamily="18" charset="0"/>
+                    <a:ea typeface="Times New Roman" panose="02020603050405020304" pitchFamily="18" charset="0"/>
+                  </a:rPr>
+                  <a:t> </a:t>
+                </a:r>
+                <a:r>
+                  <a:rPr lang="en-US" spc="-10" dirty="0">
+                    <a:effectLst/>
+                    <a:latin typeface="Times New Roman" panose="02020603050405020304" pitchFamily="18" charset="0"/>
+                    <a:ea typeface="Times New Roman" panose="02020603050405020304" pitchFamily="18" charset="0"/>
+                  </a:rPr>
+                  <a:t>Calculate </a:t>
+                </a:r>
+                <a:r>
+                  <a:rPr lang="en-US" spc="-25" dirty="0">
+                    <a:effectLst/>
+                    <a:latin typeface="Times New Roman" panose="02020603050405020304" pitchFamily="18" charset="0"/>
+                    <a:ea typeface="Times New Roman" panose="02020603050405020304" pitchFamily="18" charset="0"/>
+                  </a:rPr>
+                  <a:t>the</a:t>
+                </a:r>
+                <a:endParaRPr lang="en-MY" spc="0" dirty="0">
+                  <a:effectLst/>
+                  <a:latin typeface="Times New Roman" panose="02020603050405020304" pitchFamily="18" charset="0"/>
+                  <a:ea typeface="Times New Roman" panose="02020603050405020304" pitchFamily="18" charset="0"/>
+                </a:endParaRPr>
+              </a:p>
+              <a:p>
+                <a:pPr marL="342900" lvl="0" indent="-342900">
+                  <a:spcBef>
+                    <a:spcPts val="685"/>
+                  </a:spcBef>
+                  <a:buSzPts val="1100"/>
+                  <a:buFont typeface="Times New Roman" panose="02020603050405020304" pitchFamily="18" charset="0"/>
+                  <a:buAutoNum type="romanLcParenBoth"/>
+                  <a:tabLst>
+                    <a:tab pos="1476375" algn="l"/>
+                  </a:tabLst>
+                </a:pPr>
+                <a:r>
+                  <a:rPr lang="en-US" spc="0" dirty="0">
+                    <a:effectLst/>
+                    <a:latin typeface="Times New Roman" panose="02020603050405020304" pitchFamily="18" charset="0"/>
+                    <a:ea typeface="Times New Roman" panose="02020603050405020304" pitchFamily="18" charset="0"/>
+                  </a:rPr>
+                  <a:t>mass</a:t>
+                </a:r>
+                <a:r>
+                  <a:rPr lang="en-US" spc="-30" dirty="0">
+                    <a:effectLst/>
+                    <a:latin typeface="Times New Roman" panose="02020603050405020304" pitchFamily="18" charset="0"/>
+                    <a:ea typeface="Times New Roman" panose="02020603050405020304" pitchFamily="18" charset="0"/>
+                  </a:rPr>
+                  <a:t> </a:t>
+                </a:r>
+                <a:r>
+                  <a:rPr lang="en-US" spc="-10" dirty="0">
+                    <a:effectLst/>
+                    <a:latin typeface="Times New Roman" panose="02020603050405020304" pitchFamily="18" charset="0"/>
+                    <a:ea typeface="Times New Roman" panose="02020603050405020304" pitchFamily="18" charset="0"/>
+                  </a:rPr>
+                  <a:t>defect.</a:t>
+                </a:r>
+                <a:endParaRPr lang="en-MY" spc="0" dirty="0">
+                  <a:effectLst/>
+                  <a:latin typeface="Times New Roman" panose="02020603050405020304" pitchFamily="18" charset="0"/>
+                  <a:ea typeface="Times New Roman" panose="02020603050405020304" pitchFamily="18" charset="0"/>
+                </a:endParaRPr>
+              </a:p>
+              <a:p>
+                <a:pPr marL="342900" lvl="0" indent="-342900">
+                  <a:spcBef>
+                    <a:spcPts val="695"/>
+                  </a:spcBef>
+                  <a:buSzPts val="1100"/>
+                  <a:buFont typeface="Times New Roman" panose="02020603050405020304" pitchFamily="18" charset="0"/>
+                  <a:buAutoNum type="romanLcParenBoth"/>
+                  <a:tabLst>
+                    <a:tab pos="1476375" algn="l"/>
+                  </a:tabLst>
+                </a:pPr>
+                <a:r>
+                  <a:rPr lang="en-US" spc="0" dirty="0">
+                    <a:effectLst/>
+                    <a:latin typeface="Times New Roman" panose="02020603050405020304" pitchFamily="18" charset="0"/>
+                    <a:ea typeface="Times New Roman" panose="02020603050405020304" pitchFamily="18" charset="0"/>
+                  </a:rPr>
+                  <a:t>binding</a:t>
+                </a:r>
+                <a:r>
+                  <a:rPr lang="en-US" spc="-15" dirty="0">
+                    <a:effectLst/>
+                    <a:latin typeface="Times New Roman" panose="02020603050405020304" pitchFamily="18" charset="0"/>
+                    <a:ea typeface="Times New Roman" panose="02020603050405020304" pitchFamily="18" charset="0"/>
+                  </a:rPr>
+                  <a:t> </a:t>
+                </a:r>
+                <a:r>
+                  <a:rPr lang="en-US" spc="0" dirty="0">
+                    <a:effectLst/>
+                    <a:latin typeface="Times New Roman" panose="02020603050405020304" pitchFamily="18" charset="0"/>
+                    <a:ea typeface="Times New Roman" panose="02020603050405020304" pitchFamily="18" charset="0"/>
+                  </a:rPr>
+                  <a:t>energy</a:t>
+                </a:r>
+                <a:r>
+                  <a:rPr lang="en-US" spc="-15" dirty="0">
+                    <a:effectLst/>
+                    <a:latin typeface="Times New Roman" panose="02020603050405020304" pitchFamily="18" charset="0"/>
+                    <a:ea typeface="Times New Roman" panose="02020603050405020304" pitchFamily="18" charset="0"/>
+                  </a:rPr>
+                  <a:t> </a:t>
+                </a:r>
+                <a:r>
+                  <a:rPr lang="en-US" spc="0" dirty="0">
+                    <a:effectLst/>
+                    <a:latin typeface="Times New Roman" panose="02020603050405020304" pitchFamily="18" charset="0"/>
+                    <a:ea typeface="Times New Roman" panose="02020603050405020304" pitchFamily="18" charset="0"/>
+                  </a:rPr>
+                  <a:t>in</a:t>
+                </a:r>
+                <a:r>
+                  <a:rPr lang="en-US" spc="-10" dirty="0">
+                    <a:effectLst/>
+                    <a:latin typeface="Times New Roman" panose="02020603050405020304" pitchFamily="18" charset="0"/>
+                    <a:ea typeface="Times New Roman" panose="02020603050405020304" pitchFamily="18" charset="0"/>
+                  </a:rPr>
+                  <a:t> Joule.</a:t>
+                </a:r>
+                <a:endParaRPr lang="en-MY" spc="0" dirty="0">
+                  <a:effectLst/>
+                  <a:latin typeface="Times New Roman" panose="02020603050405020304" pitchFamily="18" charset="0"/>
+                  <a:ea typeface="Times New Roman" panose="02020603050405020304" pitchFamily="18" charset="0"/>
+                </a:endParaRPr>
+              </a:p>
+              <a:p>
+                <a:pPr marL="5250815" algn="r">
+                  <a:spcBef>
+                    <a:spcPts val="685"/>
+                  </a:spcBef>
+                  <a:buNone/>
+                </a:pPr>
+                <a:r>
+                  <a:rPr lang="en-US" dirty="0">
+                    <a:effectLst/>
+                    <a:latin typeface="Times New Roman" panose="02020603050405020304" pitchFamily="18" charset="0"/>
+                    <a:ea typeface="Times New Roman" panose="02020603050405020304" pitchFamily="18" charset="0"/>
+                  </a:rPr>
+                  <a:t>[3</a:t>
+                </a:r>
+                <a:r>
+                  <a:rPr lang="en-US" spc="-5" dirty="0">
+                    <a:effectLst/>
+                    <a:latin typeface="Times New Roman" panose="02020603050405020304" pitchFamily="18" charset="0"/>
+                    <a:ea typeface="Times New Roman" panose="02020603050405020304" pitchFamily="18" charset="0"/>
+                  </a:rPr>
+                  <a:t> </a:t>
+                </a:r>
+                <a:r>
+                  <a:rPr lang="en-US" i="1" spc="-10" dirty="0">
+                    <a:effectLst/>
+                    <a:latin typeface="Times New Roman" panose="02020603050405020304" pitchFamily="18" charset="0"/>
+                    <a:ea typeface="Times New Roman" panose="02020603050405020304" pitchFamily="18" charset="0"/>
+                  </a:rPr>
+                  <a:t>marks</a:t>
+                </a:r>
+                <a:r>
+                  <a:rPr lang="en-US" spc="-10" dirty="0">
+                    <a:effectLst/>
+                    <a:latin typeface="Times New Roman" panose="02020603050405020304" pitchFamily="18" charset="0"/>
+                    <a:ea typeface="Times New Roman" panose="02020603050405020304" pitchFamily="18" charset="0"/>
+                  </a:rPr>
+                  <a:t>]</a:t>
+                </a:r>
+                <a:endParaRPr lang="en-MY" dirty="0">
+                  <a:effectLst/>
+                  <a:latin typeface="Times New Roman" panose="02020603050405020304" pitchFamily="18" charset="0"/>
+                  <a:ea typeface="Times New Roman" panose="02020603050405020304" pitchFamily="18" charset="0"/>
+                </a:endParaRPr>
+              </a:p>
+              <a:p>
+                <a:pPr>
+                  <a:buNone/>
+                </a:pPr>
+                <a:r>
+                  <a:rPr lang="en-US" dirty="0">
+                    <a:effectLst/>
+                    <a:latin typeface="Times New Roman" panose="02020603050405020304" pitchFamily="18" charset="0"/>
+                    <a:ea typeface="Times New Roman" panose="02020603050405020304" pitchFamily="18" charset="0"/>
+                  </a:rPr>
+                  <a:t> </a:t>
+                </a:r>
+                <a:r>
+                  <a:rPr lang="en-MY" dirty="0">
+                    <a:latin typeface="Times New Roman" panose="02020603050405020304" pitchFamily="18" charset="0"/>
+                    <a:ea typeface="Times New Roman" panose="02020603050405020304" pitchFamily="18" charset="0"/>
+                  </a:rPr>
+                  <a:t>(b)   </a:t>
+                </a:r>
+                <a:r>
+                  <a:rPr lang="en-US" dirty="0">
+                    <a:effectLst/>
+                    <a:latin typeface="Times New Roman" panose="02020603050405020304" pitchFamily="18" charset="0"/>
+                    <a:ea typeface="Times New Roman" panose="02020603050405020304" pitchFamily="18" charset="0"/>
+                  </a:rPr>
+                  <a:t>A</a:t>
+                </a:r>
+                <a:r>
+                  <a:rPr lang="en-US" spc="125" dirty="0">
+                    <a:effectLst/>
+                    <a:latin typeface="Times New Roman" panose="02020603050405020304" pitchFamily="18" charset="0"/>
+                    <a:ea typeface="Times New Roman" panose="02020603050405020304" pitchFamily="18" charset="0"/>
+                  </a:rPr>
+                  <a:t> </a:t>
+                </a:r>
+                <a:r>
+                  <a:rPr lang="en-US" dirty="0">
+                    <a:effectLst/>
+                    <a:latin typeface="Times New Roman" panose="02020603050405020304" pitchFamily="18" charset="0"/>
+                    <a:ea typeface="Times New Roman" panose="02020603050405020304" pitchFamily="18" charset="0"/>
+                  </a:rPr>
+                  <a:t>sample</a:t>
+                </a:r>
+                <a:r>
+                  <a:rPr lang="en-US" spc="120" dirty="0">
+                    <a:effectLst/>
+                    <a:latin typeface="Times New Roman" panose="02020603050405020304" pitchFamily="18" charset="0"/>
+                    <a:ea typeface="Times New Roman" panose="02020603050405020304" pitchFamily="18" charset="0"/>
+                  </a:rPr>
+                  <a:t> </a:t>
+                </a:r>
+                <a:r>
+                  <a:rPr lang="en-US" dirty="0">
+                    <a:effectLst/>
+                    <a:latin typeface="Times New Roman" panose="02020603050405020304" pitchFamily="18" charset="0"/>
+                    <a:ea typeface="Times New Roman" panose="02020603050405020304" pitchFamily="18" charset="0"/>
+                  </a:rPr>
+                  <a:t>of</a:t>
+                </a:r>
+                <a:r>
+                  <a:rPr lang="en-US" spc="120" dirty="0">
+                    <a:effectLst/>
+                    <a:latin typeface="Times New Roman" panose="02020603050405020304" pitchFamily="18" charset="0"/>
+                    <a:ea typeface="Times New Roman" panose="02020603050405020304" pitchFamily="18" charset="0"/>
+                  </a:rPr>
+                  <a:t> </a:t>
+                </a:r>
+                <a:r>
+                  <a:rPr lang="en-US" dirty="0">
+                    <a:effectLst/>
+                    <a:latin typeface="Times New Roman" panose="02020603050405020304" pitchFamily="18" charset="0"/>
+                    <a:ea typeface="Times New Roman" panose="02020603050405020304" pitchFamily="18" charset="0"/>
+                  </a:rPr>
+                  <a:t>an</a:t>
+                </a:r>
+                <a:r>
+                  <a:rPr lang="en-US" spc="125" dirty="0">
+                    <a:effectLst/>
+                    <a:latin typeface="Times New Roman" panose="02020603050405020304" pitchFamily="18" charset="0"/>
+                    <a:ea typeface="Times New Roman" panose="02020603050405020304" pitchFamily="18" charset="0"/>
+                  </a:rPr>
+                  <a:t> </a:t>
+                </a:r>
+                <a:r>
+                  <a:rPr lang="en-US" dirty="0">
+                    <a:effectLst/>
+                    <a:latin typeface="Times New Roman" panose="02020603050405020304" pitchFamily="18" charset="0"/>
+                    <a:ea typeface="Times New Roman" panose="02020603050405020304" pitchFamily="18" charset="0"/>
+                  </a:rPr>
+                  <a:t>isotope</a:t>
+                </a:r>
+                <a:r>
+                  <a:rPr lang="en-US" spc="120" dirty="0">
+                    <a:effectLst/>
+                    <a:latin typeface="Times New Roman" panose="02020603050405020304" pitchFamily="18" charset="0"/>
+                    <a:ea typeface="Times New Roman" panose="02020603050405020304" pitchFamily="18" charset="0"/>
+                  </a:rPr>
+                  <a:t> </a:t>
+                </a:r>
+                <a:r>
+                  <a:rPr lang="en-US" dirty="0">
+                    <a:effectLst/>
+                    <a:latin typeface="Times New Roman" panose="02020603050405020304" pitchFamily="18" charset="0"/>
+                    <a:ea typeface="Times New Roman" panose="02020603050405020304" pitchFamily="18" charset="0"/>
+                  </a:rPr>
+                  <a:t>with</a:t>
+                </a:r>
+                <a:r>
+                  <a:rPr lang="en-US" spc="130" dirty="0">
+                    <a:effectLst/>
+                    <a:latin typeface="Times New Roman" panose="02020603050405020304" pitchFamily="18" charset="0"/>
+                    <a:ea typeface="Times New Roman" panose="02020603050405020304" pitchFamily="18" charset="0"/>
+                  </a:rPr>
+                  <a:t> </a:t>
+                </a:r>
+                <a:r>
+                  <a:rPr lang="en-US" dirty="0">
+                    <a:effectLst/>
+                    <a:latin typeface="Times New Roman" panose="02020603050405020304" pitchFamily="18" charset="0"/>
+                    <a:ea typeface="Times New Roman" panose="02020603050405020304" pitchFamily="18" charset="0"/>
+                  </a:rPr>
+                  <a:t>mass</a:t>
+                </a:r>
+                <a:r>
+                  <a:rPr lang="en-US" spc="125" dirty="0">
+                    <a:effectLst/>
+                    <a:latin typeface="Times New Roman" panose="02020603050405020304" pitchFamily="18" charset="0"/>
+                    <a:ea typeface="Times New Roman" panose="02020603050405020304" pitchFamily="18" charset="0"/>
+                  </a:rPr>
+                  <a:t> </a:t>
+                </a:r>
+                <a:r>
+                  <a:rPr lang="en-US" dirty="0">
+                    <a:effectLst/>
+                    <a:latin typeface="Times New Roman" panose="02020603050405020304" pitchFamily="18" charset="0"/>
+                    <a:ea typeface="Times New Roman" panose="02020603050405020304" pitchFamily="18" charset="0"/>
+                  </a:rPr>
+                  <a:t>number</a:t>
+                </a:r>
+                <a:r>
+                  <a:rPr lang="en-US" spc="140" dirty="0">
+                    <a:effectLst/>
+                    <a:latin typeface="Times New Roman" panose="02020603050405020304" pitchFamily="18" charset="0"/>
+                    <a:ea typeface="Times New Roman" panose="02020603050405020304" pitchFamily="18" charset="0"/>
+                  </a:rPr>
+                  <a:t> </a:t>
+                </a:r>
+                <a:r>
+                  <a:rPr lang="en-US" dirty="0">
+                    <a:effectLst/>
+                    <a:latin typeface="Times New Roman" panose="02020603050405020304" pitchFamily="18" charset="0"/>
+                    <a:ea typeface="Times New Roman" panose="02020603050405020304" pitchFamily="18" charset="0"/>
+                  </a:rPr>
+                  <a:t>114</a:t>
+                </a:r>
+                <a:r>
+                  <a:rPr lang="en-US" spc="115" dirty="0">
+                    <a:effectLst/>
+                    <a:latin typeface="Times New Roman" panose="02020603050405020304" pitchFamily="18" charset="0"/>
+                    <a:ea typeface="Times New Roman" panose="02020603050405020304" pitchFamily="18" charset="0"/>
+                  </a:rPr>
+                  <a:t> </a:t>
+                </a:r>
+                <a:r>
+                  <a:rPr lang="en-US" dirty="0">
+                    <a:effectLst/>
+                    <a:latin typeface="Times New Roman" panose="02020603050405020304" pitchFamily="18" charset="0"/>
+                    <a:ea typeface="Times New Roman" panose="02020603050405020304" pitchFamily="18" charset="0"/>
+                  </a:rPr>
+                  <a:t>decays</a:t>
+                </a:r>
+                <a:r>
+                  <a:rPr lang="en-US" spc="125" dirty="0">
+                    <a:effectLst/>
+                    <a:latin typeface="Times New Roman" panose="02020603050405020304" pitchFamily="18" charset="0"/>
+                    <a:ea typeface="Times New Roman" panose="02020603050405020304" pitchFamily="18" charset="0"/>
+                  </a:rPr>
+                  <a:t> </a:t>
+                </a:r>
+                <a:r>
+                  <a:rPr lang="en-US" dirty="0">
+                    <a:effectLst/>
+                    <a:latin typeface="Times New Roman" panose="02020603050405020304" pitchFamily="18" charset="0"/>
+                    <a:ea typeface="Times New Roman" panose="02020603050405020304" pitchFamily="18" charset="0"/>
+                  </a:rPr>
+                  <a:t>at</a:t>
+                </a:r>
+                <a:r>
+                  <a:rPr lang="en-US" spc="130" dirty="0">
+                    <a:effectLst/>
+                    <a:latin typeface="Times New Roman" panose="02020603050405020304" pitchFamily="18" charset="0"/>
+                    <a:ea typeface="Times New Roman" panose="02020603050405020304" pitchFamily="18" charset="0"/>
+                  </a:rPr>
+                  <a:t> </a:t>
+                </a:r>
+                <a:r>
+                  <a:rPr lang="en-US" dirty="0">
+                    <a:effectLst/>
+                    <a:latin typeface="Times New Roman" panose="02020603050405020304" pitchFamily="18" charset="0"/>
+                    <a:ea typeface="Times New Roman" panose="02020603050405020304" pitchFamily="18" charset="0"/>
+                  </a:rPr>
+                  <a:t>a</a:t>
+                </a:r>
+                <a:r>
+                  <a:rPr lang="en-US" spc="120" dirty="0">
+                    <a:effectLst/>
+                    <a:latin typeface="Times New Roman" panose="02020603050405020304" pitchFamily="18" charset="0"/>
+                    <a:ea typeface="Times New Roman" panose="02020603050405020304" pitchFamily="18" charset="0"/>
+                  </a:rPr>
+                  <a:t> </a:t>
+                </a:r>
+                <a:r>
+                  <a:rPr lang="en-US" dirty="0">
+                    <a:effectLst/>
+                    <a:latin typeface="Times New Roman" panose="02020603050405020304" pitchFamily="18" charset="0"/>
+                    <a:ea typeface="Times New Roman" panose="02020603050405020304" pitchFamily="18" charset="0"/>
+                  </a:rPr>
+                  <a:t>rate</a:t>
+                </a:r>
+                <a:r>
+                  <a:rPr lang="en-US" spc="120" dirty="0">
+                    <a:effectLst/>
+                    <a:latin typeface="Times New Roman" panose="02020603050405020304" pitchFamily="18" charset="0"/>
+                    <a:ea typeface="Times New Roman" panose="02020603050405020304" pitchFamily="18" charset="0"/>
+                  </a:rPr>
+                  <a:t> </a:t>
+                </a:r>
+                <a:r>
+                  <a:rPr lang="en-US" dirty="0">
+                    <a:effectLst/>
+                    <a:latin typeface="Times New Roman" panose="02020603050405020304" pitchFamily="18" charset="0"/>
+                    <a:ea typeface="Times New Roman" panose="02020603050405020304" pitchFamily="18" charset="0"/>
+                  </a:rPr>
+                  <a:t>of</a:t>
+                </a:r>
+                <a:r>
+                  <a:rPr lang="en-US" spc="120" dirty="0">
+                    <a:effectLst/>
+                    <a:latin typeface="Times New Roman" panose="02020603050405020304" pitchFamily="18" charset="0"/>
+                    <a:ea typeface="Times New Roman" panose="02020603050405020304" pitchFamily="18" charset="0"/>
+                  </a:rPr>
+                  <a:t> </a:t>
+                </a:r>
+                <a:r>
+                  <a:rPr lang="en-US" dirty="0">
+                    <a:effectLst/>
+                    <a:latin typeface="Times New Roman" panose="02020603050405020304" pitchFamily="18" charset="0"/>
+                    <a:ea typeface="Times New Roman" panose="02020603050405020304" pitchFamily="18" charset="0"/>
+                  </a:rPr>
+                  <a:t>0.550</a:t>
+                </a:r>
+                <a:r>
+                  <a:rPr lang="en-US" spc="125" dirty="0">
+                    <a:effectLst/>
+                    <a:latin typeface="Times New Roman" panose="02020603050405020304" pitchFamily="18" charset="0"/>
+                    <a:ea typeface="Times New Roman" panose="02020603050405020304" pitchFamily="18" charset="0"/>
+                  </a:rPr>
+                  <a:t> </a:t>
+                </a:r>
+                <a:r>
+                  <a:rPr lang="en-US" dirty="0">
+                    <a:effectLst/>
+                    <a:latin typeface="Times New Roman" panose="02020603050405020304" pitchFamily="18" charset="0"/>
+                    <a:ea typeface="Times New Roman" panose="02020603050405020304" pitchFamily="18" charset="0"/>
+                  </a:rPr>
+                  <a:t>Ci. Calculate the half-life of the isotope if 5.75 g of the sample is used.</a:t>
+                </a:r>
+                <a:r>
+                  <a:rPr lang="en-MY" dirty="0">
+                    <a:latin typeface="Times New Roman" panose="02020603050405020304" pitchFamily="18" charset="0"/>
+                    <a:ea typeface="Times New Roman" panose="02020603050405020304" pitchFamily="18" charset="0"/>
+                  </a:rPr>
+                  <a:t>  </a:t>
+                </a:r>
+                <a:r>
+                  <a:rPr lang="en-US" dirty="0">
+                    <a:effectLst/>
+                    <a:latin typeface="Times New Roman" panose="02020603050405020304" pitchFamily="18" charset="0"/>
+                    <a:ea typeface="Times New Roman" panose="02020603050405020304" pitchFamily="18" charset="0"/>
+                  </a:rPr>
+                  <a:t>(1 Ci =</a:t>
+                </a:r>
+                <a:r>
+                  <a:rPr lang="en-US" spc="5" dirty="0">
+                    <a:effectLst/>
+                    <a:latin typeface="Times New Roman" panose="02020603050405020304" pitchFamily="18" charset="0"/>
+                    <a:ea typeface="Times New Roman" panose="02020603050405020304" pitchFamily="18" charset="0"/>
+                  </a:rPr>
+                  <a:t> </a:t>
+                </a:r>
+                <a:r>
+                  <a:rPr lang="en-US" dirty="0">
+                    <a:effectLst/>
+                    <a:latin typeface="Times New Roman" panose="02020603050405020304" pitchFamily="18" charset="0"/>
+                    <a:ea typeface="Times New Roman" panose="02020603050405020304" pitchFamily="18" charset="0"/>
+                  </a:rPr>
+                  <a:t>3.7 ×</a:t>
+                </a:r>
+                <a:r>
+                  <a:rPr lang="en-US" spc="-5" dirty="0">
+                    <a:effectLst/>
+                    <a:latin typeface="Times New Roman" panose="02020603050405020304" pitchFamily="18" charset="0"/>
+                    <a:ea typeface="Times New Roman" panose="02020603050405020304" pitchFamily="18" charset="0"/>
+                  </a:rPr>
+                  <a:t> </a:t>
+                </a:r>
+                <a:r>
+                  <a:rPr lang="en-US" dirty="0">
+                    <a:effectLst/>
+                    <a:latin typeface="Times New Roman" panose="02020603050405020304" pitchFamily="18" charset="0"/>
+                    <a:ea typeface="Times New Roman" panose="02020603050405020304" pitchFamily="18" charset="0"/>
+                  </a:rPr>
+                  <a:t>10</a:t>
+                </a:r>
+                <a:r>
+                  <a:rPr lang="en-US" baseline="30000" dirty="0">
+                    <a:effectLst/>
+                    <a:latin typeface="Times New Roman" panose="02020603050405020304" pitchFamily="18" charset="0"/>
+                    <a:ea typeface="Times New Roman" panose="02020603050405020304" pitchFamily="18" charset="0"/>
+                  </a:rPr>
+                  <a:t>10</a:t>
+                </a:r>
+                <a:r>
+                  <a:rPr lang="en-US" spc="5" dirty="0">
+                    <a:effectLst/>
+                    <a:latin typeface="Times New Roman" panose="02020603050405020304" pitchFamily="18" charset="0"/>
+                    <a:ea typeface="Times New Roman" panose="02020603050405020304" pitchFamily="18" charset="0"/>
+                  </a:rPr>
+                  <a:t> </a:t>
+                </a:r>
+                <a:r>
+                  <a:rPr lang="en-US" spc="-25" dirty="0">
+                    <a:effectLst/>
+                    <a:latin typeface="Times New Roman" panose="02020603050405020304" pitchFamily="18" charset="0"/>
+                    <a:ea typeface="Times New Roman" panose="02020603050405020304" pitchFamily="18" charset="0"/>
+                  </a:rPr>
+                  <a:t>Bq)						</a:t>
+                </a:r>
+                <a:endParaRPr lang="en-MY" dirty="0">
+                  <a:effectLst/>
+                  <a:latin typeface="Times New Roman" panose="02020603050405020304" pitchFamily="18" charset="0"/>
+                  <a:ea typeface="Times New Roman" panose="02020603050405020304" pitchFamily="18" charset="0"/>
+                </a:endParaRPr>
+              </a:p>
+              <a:p>
+                <a:pPr marL="1003935" algn="r">
+                  <a:buNone/>
+                </a:pPr>
+                <a:r>
+                  <a:rPr lang="en-US" dirty="0">
+                    <a:effectLst/>
+                    <a:latin typeface="Times New Roman" panose="02020603050405020304" pitchFamily="18" charset="0"/>
+                    <a:ea typeface="Times New Roman" panose="02020603050405020304" pitchFamily="18" charset="0"/>
+                  </a:rPr>
+                  <a:t>[4</a:t>
+                </a:r>
+                <a:r>
+                  <a:rPr lang="en-US" spc="-5" dirty="0">
+                    <a:effectLst/>
+                    <a:latin typeface="Times New Roman" panose="02020603050405020304" pitchFamily="18" charset="0"/>
+                    <a:ea typeface="Times New Roman" panose="02020603050405020304" pitchFamily="18" charset="0"/>
+                  </a:rPr>
+                  <a:t> </a:t>
+                </a:r>
+                <a:r>
+                  <a:rPr lang="en-US" i="1" spc="-10" dirty="0">
+                    <a:effectLst/>
+                    <a:latin typeface="Times New Roman" panose="02020603050405020304" pitchFamily="18" charset="0"/>
+                    <a:ea typeface="Times New Roman" panose="02020603050405020304" pitchFamily="18" charset="0"/>
+                  </a:rPr>
+                  <a:t>marks</a:t>
+                </a:r>
+                <a:r>
+                  <a:rPr lang="en-US" spc="-10" dirty="0">
+                    <a:effectLst/>
+                    <a:latin typeface="Times New Roman" panose="02020603050405020304" pitchFamily="18" charset="0"/>
+                    <a:ea typeface="Times New Roman" panose="02020603050405020304" pitchFamily="18" charset="0"/>
+                  </a:rPr>
+                  <a:t>]</a:t>
+                </a:r>
+                <a:endParaRPr lang="en-MY" dirty="0">
+                  <a:effectLst/>
+                  <a:latin typeface="Times New Roman" panose="02020603050405020304" pitchFamily="18" charset="0"/>
+                  <a:ea typeface="Times New Roman" panose="02020603050405020304" pitchFamily="18" charset="0"/>
+                </a:endParaRPr>
+              </a:p>
+            </p:txBody>
+          </p:sp>
+        </mc:Choice>
+        <mc:Fallback xmlns="">
+          <p:sp>
+            <p:nvSpPr>
+              <p:cNvPr id="3" name="TextBox 2">
+                <a:extLst>
+                  <a:ext uri="{FF2B5EF4-FFF2-40B4-BE49-F238E27FC236}">
+                    <a16:creationId xmlns:a16="http://schemas.microsoft.com/office/drawing/2014/main" id="{56479A75-1FF9-D232-013E-A3013F892F56}"/>
+                  </a:ext>
+                </a:extLst>
+              </p:cNvPr>
+              <p:cNvSpPr txBox="1">
+                <a:spLocks noRot="1" noChangeAspect="1" noMove="1" noResize="1" noEditPoints="1" noAdjustHandles="1" noChangeArrowheads="1" noChangeShapeType="1" noTextEdit="1"/>
+              </p:cNvSpPr>
+              <p:nvPr/>
+            </p:nvSpPr>
+            <p:spPr>
+              <a:xfrm>
+                <a:off x="589937" y="408483"/>
+                <a:ext cx="10692580" cy="2588722"/>
+              </a:xfrm>
+              <a:prstGeom prst="rect">
+                <a:avLst/>
+              </a:prstGeom>
+              <a:blipFill>
+                <a:blip r:embed="rId2"/>
+                <a:stretch>
+                  <a:fillRect l="-513" t="-706" r="-456" b="-2824"/>
+                </a:stretch>
+              </a:blipFill>
+            </p:spPr>
+            <p:txBody>
+              <a:bodyPr/>
+              <a:lstStyle/>
+              <a:p>
+                <a:r>
+                  <a:rPr lang="en-MY">
+                    <a:noFill/>
+                  </a:rPr>
+                  <a:t> </a:t>
+                </a:r>
+              </a:p>
+            </p:txBody>
+          </p:sp>
+        </mc:Fallback>
+      </mc:AlternateContent>
+      <p:pic>
+        <p:nvPicPr>
+          <p:cNvPr id="5" name="Picture 4">
+            <a:extLst>
+              <a:ext uri="{FF2B5EF4-FFF2-40B4-BE49-F238E27FC236}">
+                <a16:creationId xmlns:a16="http://schemas.microsoft.com/office/drawing/2014/main" id="{04661572-E2F5-B00B-B0B2-31DC29D31222}"/>
+              </a:ext>
+            </a:extLst>
+          </p:cNvPr>
+          <p:cNvPicPr>
+            <a:picLocks noChangeAspect="1"/>
+          </p:cNvPicPr>
+          <p:nvPr/>
+        </p:nvPicPr>
+        <p:blipFill>
+          <a:blip r:embed="rId3"/>
+          <a:stretch>
+            <a:fillRect/>
+          </a:stretch>
+        </p:blipFill>
+        <p:spPr>
+          <a:xfrm>
+            <a:off x="710489" y="5477831"/>
+            <a:ext cx="3096057" cy="971686"/>
+          </a:xfrm>
+          <a:prstGeom prst="rect">
+            <a:avLst/>
+          </a:prstGeom>
+        </p:spPr>
+      </p:pic>
+    </p:spTree>
+    <p:extLst>
+      <p:ext uri="{BB962C8B-B14F-4D97-AF65-F5344CB8AC3E}">
+        <p14:creationId xmlns:p14="http://schemas.microsoft.com/office/powerpoint/2010/main" val="3830255145"/>
+      </p:ext>
+    </p:extLst>
+  </p:cSld>
+  <p:clrMapOvr>
+    <a:masterClrMapping/>
+  </p:clrMapOvr>
+</p:sld>
+</file>
+
+<file path=ppt/slides/slide8.xml><?xml version="1.0" encoding="utf-8"?>
+<p:sld xmlns:a="http://schemas.openxmlformats.org/drawingml/2006/main" xmlns:r="http://schemas.openxmlformats.org/officeDocument/2006/relationships" xmlns:p="http://schemas.openxmlformats.org/presentationml/2006/main">
+  <p:cSld>
+    <p:spTree>
+      <p:nvGrpSpPr>
+        <p:cNvPr id="1" name=""/>
+        <p:cNvGrpSpPr/>
+        <p:nvPr/>
+      </p:nvGrpSpPr>
+      <p:grpSpPr>
+        <a:xfrm>
+          <a:off x="0" y="0"/>
+          <a:ext cx="0" cy="0"/>
+          <a:chOff x="0" y="0"/>
+          <a:chExt cx="0" cy="0"/>
+        </a:xfrm>
+      </p:grpSpPr>
+      <mc:AlternateContent xmlns:mc="http://schemas.openxmlformats.org/markup-compatibility/2006" xmlns:a14="http://schemas.microsoft.com/office/drawing/2010/main">
+        <mc:Choice Requires="a14">
+          <p:sp>
+            <p:nvSpPr>
+              <p:cNvPr id="3" name="TextBox 2">
+                <a:extLst>
+                  <a:ext uri="{FF2B5EF4-FFF2-40B4-BE49-F238E27FC236}">
+                    <a16:creationId xmlns:a16="http://schemas.microsoft.com/office/drawing/2014/main" id="{520D9B1A-9101-3622-B20F-C4C4A979EAA5}"/>
+                  </a:ext>
+                </a:extLst>
+              </p:cNvPr>
+              <p:cNvSpPr txBox="1"/>
+              <p:nvPr/>
+            </p:nvSpPr>
+            <p:spPr>
+              <a:xfrm>
+                <a:off x="582304" y="399011"/>
+                <a:ext cx="11027391" cy="2592184"/>
+              </a:xfrm>
+              <a:prstGeom prst="rect">
+                <a:avLst/>
+              </a:prstGeom>
+              <a:noFill/>
+            </p:spPr>
+            <p:txBody>
+              <a:bodyPr wrap="square">
+                <a:spAutoFit/>
+              </a:bodyPr>
+              <a:lstStyle/>
+              <a:p>
+                <a:pPr>
+                  <a:buNone/>
+                </a:pPr>
+                <a:r>
+                  <a:rPr lang="en-MY" dirty="0">
+                    <a:solidFill>
+                      <a:srgbClr val="000000"/>
+                    </a:solidFill>
+                    <a:latin typeface="Times New Roman" panose="02020603050405020304" pitchFamily="18" charset="0"/>
+                    <a:ea typeface="Aptos" panose="020B0004020202020204" pitchFamily="34" charset="0"/>
+                  </a:rPr>
+                  <a:t>9</a:t>
+                </a:r>
+                <a:r>
+                  <a:rPr lang="en-MY" sz="1800" dirty="0">
+                    <a:solidFill>
+                      <a:srgbClr val="000000"/>
+                    </a:solidFill>
+                    <a:effectLst/>
+                    <a:latin typeface="Times New Roman" panose="02020603050405020304" pitchFamily="18" charset="0"/>
+                    <a:ea typeface="Aptos" panose="020B0004020202020204" pitchFamily="34" charset="0"/>
+                  </a:rPr>
+                  <a:t>  (a) Calculate the binding energy per nucleon for</a:t>
+                </a:r>
+                <a14:m>
+                  <m:oMath xmlns:m="http://schemas.openxmlformats.org/officeDocument/2006/math">
+                    <m:sPre>
+                      <m:sPrePr>
+                        <m:ctrlPr>
+                          <a:rPr lang="en-MY" sz="1800" i="1">
+                            <a:solidFill>
+                              <a:srgbClr val="000000"/>
+                            </a:solidFill>
+                            <a:effectLst/>
+                            <a:latin typeface="Cambria Math" panose="02040503050406030204" pitchFamily="18" charset="0"/>
+                            <a:ea typeface="Aptos" panose="020B0004020202020204" pitchFamily="34" charset="0"/>
+                          </a:rPr>
+                        </m:ctrlPr>
+                      </m:sPrePr>
+                      <m:sub>
+                        <m:r>
+                          <a:rPr lang="en-MY" sz="1800" i="1">
+                            <a:solidFill>
+                              <a:srgbClr val="000000"/>
+                            </a:solidFill>
+                            <a:effectLst/>
+                            <a:latin typeface="Cambria Math" panose="02040503050406030204" pitchFamily="18" charset="0"/>
+                            <a:ea typeface="Aptos" panose="020B0004020202020204" pitchFamily="34" charset="0"/>
+                          </a:rPr>
+                          <m:t>3</m:t>
+                        </m:r>
+                      </m:sub>
+                      <m:sup>
+                        <m:r>
+                          <a:rPr lang="en-MY" sz="1800" i="1">
+                            <a:solidFill>
+                              <a:srgbClr val="000000"/>
+                            </a:solidFill>
+                            <a:effectLst/>
+                            <a:latin typeface="Cambria Math" panose="02040503050406030204" pitchFamily="18" charset="0"/>
+                            <a:ea typeface="Aptos" panose="020B0004020202020204" pitchFamily="34" charset="0"/>
+                          </a:rPr>
+                          <m:t>6</m:t>
+                        </m:r>
+                      </m:sup>
+                      <m:e>
+                        <m:r>
+                          <m:rPr>
+                            <m:sty m:val="p"/>
+                          </m:rPr>
+                          <a:rPr lang="en-MY" sz="1800">
+                            <a:solidFill>
+                              <a:srgbClr val="000000"/>
+                            </a:solidFill>
+                            <a:effectLst/>
+                            <a:latin typeface="Cambria Math" panose="02040503050406030204" pitchFamily="18" charset="0"/>
+                            <a:ea typeface="Aptos" panose="020B0004020202020204" pitchFamily="34" charset="0"/>
+                          </a:rPr>
+                          <m:t>Li</m:t>
+                        </m:r>
+                      </m:e>
+                    </m:sPre>
+                  </m:oMath>
+                </a14:m>
+                <a:r>
+                  <a:rPr lang="en-MY" sz="1800" dirty="0">
+                    <a:solidFill>
+                      <a:srgbClr val="000000"/>
+                    </a:solidFill>
+                    <a:effectLst/>
+                    <a:latin typeface="Times New Roman" panose="02020603050405020304" pitchFamily="18" charset="0"/>
+                    <a:ea typeface="Aptos" panose="020B0004020202020204" pitchFamily="34" charset="0"/>
+                  </a:rPr>
+                  <a:t>. </a:t>
+                </a:r>
+                <a:endParaRPr lang="en-MY" sz="2000" dirty="0">
+                  <a:solidFill>
+                    <a:srgbClr val="000000"/>
+                  </a:solidFill>
+                  <a:effectLst/>
+                  <a:latin typeface="Times New Roman" panose="02020603050405020304" pitchFamily="18" charset="0"/>
+                  <a:ea typeface="Aptos" panose="020B0004020202020204" pitchFamily="34" charset="0"/>
+                </a:endParaRPr>
+              </a:p>
+              <a:p>
+                <a:pPr>
+                  <a:buNone/>
+                </a:pPr>
+                <a:r>
+                  <a:rPr lang="en-MY" sz="1800" dirty="0">
+                    <a:solidFill>
+                      <a:srgbClr val="000000"/>
+                    </a:solidFill>
+                    <a:effectLst/>
+                    <a:latin typeface="Times New Roman" panose="02020603050405020304" pitchFamily="18" charset="0"/>
+                    <a:ea typeface="Aptos" panose="020B0004020202020204" pitchFamily="34" charset="0"/>
+                  </a:rPr>
+                  <a:t>(Given mass of nucleus Li = 6.015123 u and mass of H = 1.007825u) 														[3 </a:t>
+                </a:r>
+                <a:r>
+                  <a:rPr lang="en-MY" sz="1800" i="1" dirty="0">
+                    <a:solidFill>
+                      <a:srgbClr val="000000"/>
+                    </a:solidFill>
+                    <a:effectLst/>
+                    <a:latin typeface="Times New Roman" panose="02020603050405020304" pitchFamily="18" charset="0"/>
+                    <a:ea typeface="Aptos" panose="020B0004020202020204" pitchFamily="34" charset="0"/>
+                  </a:rPr>
+                  <a:t>marks </a:t>
+                </a:r>
+                <a:r>
+                  <a:rPr lang="en-MY" sz="1800" dirty="0">
+                    <a:solidFill>
+                      <a:srgbClr val="000000"/>
+                    </a:solidFill>
+                    <a:effectLst/>
+                    <a:latin typeface="Times New Roman" panose="02020603050405020304" pitchFamily="18" charset="0"/>
+                    <a:ea typeface="Aptos" panose="020B0004020202020204" pitchFamily="34" charset="0"/>
+                  </a:rPr>
+                  <a:t>] </a:t>
+                </a:r>
+                <a:endParaRPr lang="en-MY" sz="2000" dirty="0">
+                  <a:solidFill>
+                    <a:srgbClr val="000000"/>
+                  </a:solidFill>
+                  <a:effectLst/>
+                  <a:latin typeface="Times New Roman" panose="02020603050405020304" pitchFamily="18" charset="0"/>
+                  <a:ea typeface="Aptos" panose="020B0004020202020204" pitchFamily="34" charset="0"/>
+                </a:endParaRPr>
+              </a:p>
+              <a:p>
+                <a:pPr>
+                  <a:buNone/>
+                </a:pPr>
+                <a:r>
+                  <a:rPr lang="en-MY" sz="1800" dirty="0">
+                    <a:solidFill>
+                      <a:srgbClr val="000000"/>
+                    </a:solidFill>
+                    <a:effectLst/>
+                    <a:latin typeface="Times New Roman" panose="02020603050405020304" pitchFamily="18" charset="0"/>
+                    <a:ea typeface="Aptos" panose="020B0004020202020204" pitchFamily="34" charset="0"/>
+                  </a:rPr>
+                  <a:t> </a:t>
+                </a:r>
+                <a:endParaRPr lang="en-MY" sz="2000" dirty="0">
+                  <a:solidFill>
+                    <a:srgbClr val="000000"/>
+                  </a:solidFill>
+                  <a:effectLst/>
+                  <a:latin typeface="Times New Roman" panose="02020603050405020304" pitchFamily="18" charset="0"/>
+                  <a:ea typeface="Aptos" panose="020B0004020202020204" pitchFamily="34" charset="0"/>
+                </a:endParaRPr>
+              </a:p>
+              <a:p>
+                <a:pPr>
+                  <a:buNone/>
+                </a:pPr>
+                <a:r>
+                  <a:rPr lang="en-MY" sz="1800" dirty="0">
+                    <a:solidFill>
+                      <a:srgbClr val="000000"/>
+                    </a:solidFill>
+                    <a:effectLst/>
+                    <a:latin typeface="Times New Roman" panose="02020603050405020304" pitchFamily="18" charset="0"/>
+                    <a:ea typeface="Aptos" panose="020B0004020202020204" pitchFamily="34" charset="0"/>
+                  </a:rPr>
+                  <a:t>(b) A radioactive sample has an initial activity 9 </a:t>
+                </a:r>
+                <a:r>
+                  <a:rPr lang="en-MY" sz="1800" dirty="0" err="1">
+                    <a:solidFill>
+                      <a:srgbClr val="000000"/>
+                    </a:solidFill>
+                    <a:effectLst/>
+                    <a:latin typeface="Times New Roman" panose="02020603050405020304" pitchFamily="18" charset="0"/>
+                    <a:ea typeface="Aptos" panose="020B0004020202020204" pitchFamily="34" charset="0"/>
+                  </a:rPr>
+                  <a:t>mCi</a:t>
+                </a:r>
+                <a:r>
+                  <a:rPr lang="en-MY" sz="1800" dirty="0">
+                    <a:solidFill>
+                      <a:srgbClr val="000000"/>
+                    </a:solidFill>
+                    <a:effectLst/>
+                    <a:latin typeface="Times New Roman" panose="02020603050405020304" pitchFamily="18" charset="0"/>
+                    <a:ea typeface="Aptos" panose="020B0004020202020204" pitchFamily="34" charset="0"/>
+                  </a:rPr>
+                  <a:t>. After 16 hours, its activity reduces to 7 </a:t>
+                </a:r>
+                <a:r>
+                  <a:rPr lang="en-MY" sz="1800" dirty="0" err="1">
+                    <a:solidFill>
+                      <a:srgbClr val="000000"/>
+                    </a:solidFill>
+                    <a:effectLst/>
+                    <a:latin typeface="Times New Roman" panose="02020603050405020304" pitchFamily="18" charset="0"/>
+                    <a:ea typeface="Aptos" panose="020B0004020202020204" pitchFamily="34" charset="0"/>
+                  </a:rPr>
+                  <a:t>mCi</a:t>
+                </a:r>
+                <a:r>
+                  <a:rPr lang="en-MY" sz="1800" dirty="0">
+                    <a:solidFill>
+                      <a:srgbClr val="000000"/>
+                    </a:solidFill>
+                    <a:effectLst/>
+                    <a:latin typeface="Times New Roman" panose="02020603050405020304" pitchFamily="18" charset="0"/>
+                    <a:ea typeface="Aptos" panose="020B0004020202020204" pitchFamily="34" charset="0"/>
+                  </a:rPr>
+                  <a:t>. Calculate </a:t>
+                </a:r>
+                <a:endParaRPr lang="en-MY" sz="2000" dirty="0">
+                  <a:solidFill>
+                    <a:srgbClr val="000000"/>
+                  </a:solidFill>
+                  <a:effectLst/>
+                  <a:latin typeface="Times New Roman" panose="02020603050405020304" pitchFamily="18" charset="0"/>
+                  <a:ea typeface="Aptos" panose="020B0004020202020204" pitchFamily="34" charset="0"/>
+                </a:endParaRPr>
+              </a:p>
+              <a:p>
+                <a:pPr>
+                  <a:buNone/>
+                </a:pPr>
+                <a:r>
+                  <a:rPr lang="en-MY" sz="1800" dirty="0">
+                    <a:solidFill>
+                      <a:srgbClr val="000000"/>
+                    </a:solidFill>
+                    <a:effectLst/>
+                    <a:latin typeface="Times New Roman" panose="02020603050405020304" pitchFamily="18" charset="0"/>
+                    <a:ea typeface="Aptos" panose="020B0004020202020204" pitchFamily="34" charset="0"/>
+                  </a:rPr>
+                  <a:t>(</a:t>
+                </a:r>
+                <a:r>
+                  <a:rPr lang="en-MY" sz="1800" dirty="0" err="1">
+                    <a:solidFill>
+                      <a:srgbClr val="000000"/>
+                    </a:solidFill>
+                    <a:effectLst/>
+                    <a:latin typeface="Times New Roman" panose="02020603050405020304" pitchFamily="18" charset="0"/>
+                    <a:ea typeface="Aptos" panose="020B0004020202020204" pitchFamily="34" charset="0"/>
+                  </a:rPr>
+                  <a:t>i</a:t>
+                </a:r>
+                <a:r>
+                  <a:rPr lang="en-MY" sz="1800" dirty="0">
+                    <a:solidFill>
+                      <a:srgbClr val="000000"/>
+                    </a:solidFill>
+                    <a:effectLst/>
+                    <a:latin typeface="Times New Roman" panose="02020603050405020304" pitchFamily="18" charset="0"/>
+                    <a:ea typeface="Aptos" panose="020B0004020202020204" pitchFamily="34" charset="0"/>
+                  </a:rPr>
+                  <a:t>) the half life. </a:t>
+                </a:r>
+                <a:endParaRPr lang="en-MY" sz="2000" dirty="0">
+                  <a:solidFill>
+                    <a:srgbClr val="000000"/>
+                  </a:solidFill>
+                  <a:effectLst/>
+                  <a:latin typeface="Times New Roman" panose="02020603050405020304" pitchFamily="18" charset="0"/>
+                  <a:ea typeface="Aptos" panose="020B0004020202020204" pitchFamily="34" charset="0"/>
+                </a:endParaRPr>
+              </a:p>
+              <a:p>
+                <a:pPr>
+                  <a:buNone/>
+                </a:pPr>
+                <a:r>
+                  <a:rPr lang="en-MY" sz="1800" dirty="0">
+                    <a:solidFill>
+                      <a:srgbClr val="000000"/>
+                    </a:solidFill>
+                    <a:effectLst/>
+                    <a:latin typeface="Times New Roman" panose="02020603050405020304" pitchFamily="18" charset="0"/>
+                    <a:ea typeface="Aptos" panose="020B0004020202020204" pitchFamily="34" charset="0"/>
+                  </a:rPr>
+                  <a:t>(ii) </a:t>
+                </a:r>
+                <a:r>
+                  <a:rPr lang="en-MY" sz="1800" dirty="0" err="1">
+                    <a:solidFill>
+                      <a:srgbClr val="000000"/>
+                    </a:solidFill>
+                    <a:effectLst/>
+                    <a:latin typeface="Times New Roman" panose="02020603050405020304" pitchFamily="18" charset="0"/>
+                    <a:ea typeface="Aptos" panose="020B0004020202020204" pitchFamily="34" charset="0"/>
+                  </a:rPr>
+                  <a:t>intial</a:t>
+                </a:r>
+                <a:r>
+                  <a:rPr lang="en-MY" sz="1800" dirty="0">
+                    <a:solidFill>
+                      <a:srgbClr val="000000"/>
+                    </a:solidFill>
+                    <a:effectLst/>
+                    <a:latin typeface="Times New Roman" panose="02020603050405020304" pitchFamily="18" charset="0"/>
+                    <a:ea typeface="Aptos" panose="020B0004020202020204" pitchFamily="34" charset="0"/>
+                  </a:rPr>
+                  <a:t> number of nuclei. </a:t>
+                </a:r>
+                <a:endParaRPr lang="en-MY" sz="2000" dirty="0">
+                  <a:solidFill>
+                    <a:srgbClr val="000000"/>
+                  </a:solidFill>
+                  <a:effectLst/>
+                  <a:latin typeface="Times New Roman" panose="02020603050405020304" pitchFamily="18" charset="0"/>
+                  <a:ea typeface="Aptos" panose="020B0004020202020204" pitchFamily="34" charset="0"/>
+                </a:endParaRPr>
+              </a:p>
+              <a:p>
+                <a:pPr>
+                  <a:buNone/>
+                </a:pPr>
+                <a:r>
+                  <a:rPr lang="en-MY" sz="1800" dirty="0">
+                    <a:effectLst/>
+                    <a:latin typeface="Aptos" panose="020B0004020202020204" pitchFamily="34" charset="0"/>
+                    <a:ea typeface="Aptos" panose="020B0004020202020204" pitchFamily="34" charset="0"/>
+                    <a:cs typeface="Times New Roman" panose="02020603050405020304" pitchFamily="18" charset="0"/>
+                  </a:rPr>
+                  <a:t>(1 Ci = 3.7 × 10</a:t>
+                </a:r>
+                <a:r>
+                  <a:rPr lang="en-MY" sz="1800" baseline="30000" dirty="0">
+                    <a:effectLst/>
+                    <a:latin typeface="Aptos" panose="020B0004020202020204" pitchFamily="34" charset="0"/>
+                    <a:ea typeface="Aptos" panose="020B0004020202020204" pitchFamily="34" charset="0"/>
+                    <a:cs typeface="Times New Roman" panose="02020603050405020304" pitchFamily="18" charset="0"/>
+                  </a:rPr>
+                  <a:t>10</a:t>
+                </a:r>
+                <a:r>
+                  <a:rPr lang="en-MY" sz="1800" dirty="0">
+                    <a:effectLst/>
+                    <a:latin typeface="Aptos" panose="020B0004020202020204" pitchFamily="34" charset="0"/>
+                    <a:ea typeface="Aptos" panose="020B0004020202020204" pitchFamily="34" charset="0"/>
+                    <a:cs typeface="Times New Roman" panose="02020603050405020304" pitchFamily="18" charset="0"/>
+                  </a:rPr>
+                  <a:t> Bq) 								</a:t>
+                </a:r>
+                <a:r>
+                  <a:rPr lang="en-MY" dirty="0"/>
+                  <a:t> [ 4 </a:t>
+                </a:r>
+                <a:r>
+                  <a:rPr lang="en-MY" i="1" dirty="0"/>
+                  <a:t>marks </a:t>
+                </a:r>
+                <a:r>
+                  <a:rPr lang="en-MY" dirty="0"/>
+                  <a:t>] </a:t>
+                </a:r>
+                <a:r>
+                  <a:rPr lang="en-MY" sz="1800" dirty="0">
+                    <a:effectLst/>
+                    <a:latin typeface="Aptos" panose="020B0004020202020204" pitchFamily="34" charset="0"/>
+                    <a:ea typeface="Aptos" panose="020B0004020202020204" pitchFamily="34" charset="0"/>
+                    <a:cs typeface="Times New Roman" panose="02020603050405020304" pitchFamily="18" charset="0"/>
+                  </a:rPr>
+                  <a:t>					</a:t>
+                </a:r>
+                <a:endParaRPr lang="en-MY" dirty="0"/>
+              </a:p>
+            </p:txBody>
+          </p:sp>
+        </mc:Choice>
+        <mc:Fallback xmlns="">
+          <p:sp>
+            <p:nvSpPr>
+              <p:cNvPr id="3" name="TextBox 2">
+                <a:extLst>
+                  <a:ext uri="{FF2B5EF4-FFF2-40B4-BE49-F238E27FC236}">
+                    <a16:creationId xmlns:a16="http://schemas.microsoft.com/office/drawing/2014/main" id="{520D9B1A-9101-3622-B20F-C4C4A979EAA5}"/>
+                  </a:ext>
+                </a:extLst>
+              </p:cNvPr>
+              <p:cNvSpPr txBox="1">
+                <a:spLocks noRot="1" noChangeAspect="1" noMove="1" noResize="1" noEditPoints="1" noAdjustHandles="1" noChangeArrowheads="1" noChangeShapeType="1" noTextEdit="1"/>
+              </p:cNvSpPr>
+              <p:nvPr/>
+            </p:nvSpPr>
+            <p:spPr>
+              <a:xfrm>
+                <a:off x="582304" y="399011"/>
+                <a:ext cx="11027391" cy="2592184"/>
+              </a:xfrm>
+              <a:prstGeom prst="rect">
+                <a:avLst/>
+              </a:prstGeom>
+              <a:blipFill>
+                <a:blip r:embed="rId2"/>
+                <a:stretch>
+                  <a:fillRect l="-498" t="-939"/>
+                </a:stretch>
+              </a:blipFill>
+            </p:spPr>
+            <p:txBody>
+              <a:bodyPr/>
+              <a:lstStyle/>
+              <a:p>
+                <a:r>
+                  <a:rPr lang="en-MY">
+                    <a:noFill/>
+                  </a:rPr>
+                  <a:t> </a:t>
+                </a:r>
+              </a:p>
+            </p:txBody>
+          </p:sp>
+        </mc:Fallback>
+      </mc:AlternateContent>
+      <p:pic>
+        <p:nvPicPr>
+          <p:cNvPr id="7" name="Picture 6">
+            <a:extLst>
+              <a:ext uri="{FF2B5EF4-FFF2-40B4-BE49-F238E27FC236}">
+                <a16:creationId xmlns:a16="http://schemas.microsoft.com/office/drawing/2014/main" id="{E0C34437-388C-C61A-5213-073D542684F9}"/>
+              </a:ext>
+            </a:extLst>
+          </p:cNvPr>
+          <p:cNvPicPr>
+            <a:picLocks noChangeAspect="1"/>
+          </p:cNvPicPr>
+          <p:nvPr/>
+        </p:nvPicPr>
+        <p:blipFill>
+          <a:blip r:embed="rId3"/>
+          <a:stretch>
+            <a:fillRect/>
+          </a:stretch>
+        </p:blipFill>
+        <p:spPr>
+          <a:xfrm>
+            <a:off x="8823671" y="5855871"/>
+            <a:ext cx="3238952" cy="752580"/>
+          </a:xfrm>
+          <a:prstGeom prst="rect">
+            <a:avLst/>
+          </a:prstGeom>
+        </p:spPr>
+      </p:pic>
+    </p:spTree>
+    <p:extLst>
+      <p:ext uri="{BB962C8B-B14F-4D97-AF65-F5344CB8AC3E}">
+        <p14:creationId xmlns:p14="http://schemas.microsoft.com/office/powerpoint/2010/main" val="1171119453"/>
+      </p:ext>
+    </p:extLst>
+  </p:cSld>
+  <p:clrMapOvr>
+    <a:masterClrMapping/>
+  </p:clrMapOvr>
+</p:sld>
+</file>
+
+<file path=ppt/slides/slide9.xml><?xml version="1.0" encoding="utf-8"?>
+<p:sld xmlns:a="http://schemas.openxmlformats.org/drawingml/2006/main" xmlns:r="http://schemas.openxmlformats.org/officeDocument/2006/relationships" xmlns:p="http://schemas.openxmlformats.org/presentationml/2006/main">
+  <p:cSld>
+    <p:spTree>
+      <p:nvGrpSpPr>
+        <p:cNvPr id="1" name=""/>
+        <p:cNvGrpSpPr/>
+        <p:nvPr/>
+      </p:nvGrpSpPr>
+      <p:grpSpPr>
+        <a:xfrm>
+          <a:off x="0" y="0"/>
+          <a:ext cx="0" cy="0"/>
+          <a:chOff x="0" y="0"/>
+          <a:chExt cx="0" cy="0"/>
+        </a:xfrm>
+      </p:grpSpPr>
+      <p:sp>
+        <p:nvSpPr>
+          <p:cNvPr id="20" name="Rectangle 19">
+            <a:extLst>
+              <a:ext uri="{FF2B5EF4-FFF2-40B4-BE49-F238E27FC236}">
+                <a16:creationId xmlns:a16="http://schemas.microsoft.com/office/drawing/2014/main" id="{02DDC07E-A21D-B650-1139-102FA223A26A}"/>
+              </a:ext>
+            </a:extLst>
+          </p:cNvPr>
+          <p:cNvSpPr>
+            <a:spLocks noChangeArrowheads="1"/>
+          </p:cNvSpPr>
+          <p:nvPr/>
+        </p:nvSpPr>
+        <p:spPr bwMode="auto">
+          <a:xfrm>
+            <a:off x="0" y="1356852"/>
+            <a:ext cx="12192000" cy="457200"/>
+          </a:xfrm>
+          <a:prstGeom prst="rect">
+            <a:avLst/>
+          </a:prstGeom>
+          <a:noFill/>
+          <a:ln>
+            <a:noFill/>
+          </a:ln>
+          <a:effectLst/>
+          <a:extLst>
+            <a:ext uri="{909E8E84-426E-40DD-AFC4-6F175D3DCCD1}">
+              <a14:hiddenFill xmlns:a14="http://schemas.microsoft.com/office/drawing/2010/main">
+                <a:solidFill>
+                  <a:schemeClr val="accent1"/>
+                </a:solidFill>
+              </a14:hiddenFill>
+            </a:ext>
+            <a:ext uri="{91240B29-F687-4F45-9708-019B960494DF}">
+              <a14:hiddenLine xmlns:a14="http://schemas.microsoft.com/office/drawing/2010/main" w="9525">
+                <a:solidFill>
+                  <a:schemeClr val="tx1"/>
+                </a:solidFill>
+                <a:miter lim="800000"/>
+                <a:headEnd/>
+                <a:tailEnd/>
+              </a14:hiddenLine>
+            </a:ext>
+            <a:ext uri="{AF507438-7753-43E0-B8FC-AC1667EBCBE1}">
+              <a14:hiddenEffects xmlns:a14="http://schemas.microsoft.com/office/drawing/2010/main">
+                <a:effectLst>
+                  <a:outerShdw dist="35921" dir="2700000" algn="ctr" rotWithShape="0">
+                    <a:schemeClr val="bg2"/>
+                  </a:outerShdw>
+                </a:effectLst>
+              </a14:hiddenEffects>
+            </a:ext>
+          </a:extLst>
+        </p:spPr>
+        <p:txBody>
+          <a:bodyPr vert="horz" wrap="none" lIns="91440" tIns="45720" rIns="91440" bIns="45720" numCol="1" anchor="ctr" anchorCtr="0" compatLnSpc="1">
+            <a:prstTxWarp prst="textNoShape">
+              <a:avLst/>
+            </a:prstTxWarp>
+            <a:spAutoFit/>
+          </a:bodyPr>
+          <a:lstStyle/>
+          <a:p>
+            <a:pPr marL="0" marR="0" lvl="0" indent="0" algn="l" defTabSz="914400" rtl="0" eaLnBrk="0" fontAlgn="base" latinLnBrk="0" hangingPunct="0">
+              <a:lnSpc>
+                <a:spcPct val="100000"/>
+              </a:lnSpc>
+              <a:spcBef>
+                <a:spcPct val="0"/>
+              </a:spcBef>
+              <a:spcAft>
+                <a:spcPct val="0"/>
+              </a:spcAft>
+              <a:buClrTx/>
+              <a:buSzTx/>
+              <a:buFontTx/>
+              <a:buNone/>
+              <a:tabLst/>
+            </a:pPr>
+            <a:endParaRPr kumimoji="0" lang="en-US" altLang="en-US" sz="1800" b="0" i="0" u="none" strike="noStrike" cap="none" normalizeH="0" baseline="0">
+              <a:ln>
+                <a:noFill/>
+              </a:ln>
+              <a:solidFill>
+                <a:schemeClr val="tx1"/>
+              </a:solidFill>
+              <a:effectLst/>
+              <a:latin typeface="Arial" panose="020B0604020202020204" pitchFamily="34" charset="0"/>
+            </a:endParaRPr>
+          </a:p>
+        </p:txBody>
+      </p:sp>
+      <mc:AlternateContent xmlns:mc="http://schemas.openxmlformats.org/markup-compatibility/2006" xmlns:a14="http://schemas.microsoft.com/office/drawing/2010/main">
+        <mc:Choice Requires="a14">
+          <p:sp>
+            <p:nvSpPr>
+              <p:cNvPr id="21" name="Rectangle 20">
+                <a:extLst>
+                  <a:ext uri="{FF2B5EF4-FFF2-40B4-BE49-F238E27FC236}">
+                    <a16:creationId xmlns:a16="http://schemas.microsoft.com/office/drawing/2014/main" id="{39E855D1-5027-E12C-ADD5-BC004238E2A5}"/>
+                  </a:ext>
+                </a:extLst>
+              </p:cNvPr>
+              <p:cNvSpPr>
+                <a:spLocks noChangeArrowheads="1"/>
+              </p:cNvSpPr>
+              <p:nvPr/>
+            </p:nvSpPr>
+            <p:spPr bwMode="auto">
+              <a:xfrm>
+                <a:off x="309716" y="516350"/>
+                <a:ext cx="11297265" cy="856645"/>
+              </a:xfrm>
+              <a:prstGeom prst="rect">
+                <a:avLst/>
+              </a:prstGeom>
+              <a:noFill/>
+              <a:ln>
+                <a:noFill/>
+              </a:ln>
+              <a:effectLst/>
+              <a:extLst>
+                <a:ext uri="{909E8E84-426E-40DD-AFC4-6F175D3DCCD1}">
+                  <a14:hiddenFill>
+                    <a:solidFill>
+                      <a:schemeClr val="accent1"/>
+                    </a:solidFill>
+                  </a14:hiddenFill>
+                </a:ext>
+                <a:ext uri="{91240B29-F687-4F45-9708-019B960494DF}">
+                  <a14:hiddenLine w="9525">
+                    <a:solidFill>
+                      <a:schemeClr val="tx1"/>
+                    </a:solidFill>
+                    <a:miter lim="800000"/>
+                    <a:headEnd/>
+                    <a:tailEnd/>
+                  </a14:hiddenLine>
+                </a:ext>
+                <a:ext uri="{AF507438-7753-43E0-B8FC-AC1667EBCBE1}">
+                  <a14:hiddenEffects>
+                    <a:effectLst>
+                      <a:outerShdw dist="35921" dir="2700000" algn="ctr" rotWithShape="0">
+                        <a:schemeClr val="bg2"/>
+                      </a:outerShdw>
+                    </a:effectLst>
+                  </a14:hiddenEffects>
+                </a:ext>
+              </a:extLst>
+            </p:spPr>
+            <p:txBody>
+              <a:bodyPr vert="horz" wrap="square" lIns="91440" tIns="45720" rIns="91440" bIns="45720" numCol="1" anchor="ctr" anchorCtr="0" compatLnSpc="1">
+                <a:prstTxWarp prst="textNoShape">
+                  <a:avLst/>
+                </a:prstTxWarp>
+                <a:spAutoFit/>
+              </a:bodyPr>
+              <a:lstStyle/>
+              <a:p>
+                <a:pPr marL="0" marR="0" lvl="0" indent="0" algn="l" defTabSz="914400" rtl="0" eaLnBrk="0" fontAlgn="base" latinLnBrk="0" hangingPunct="0">
+                  <a:lnSpc>
+                    <a:spcPct val="100000"/>
+                  </a:lnSpc>
+                  <a:spcBef>
+                    <a:spcPct val="0"/>
+                  </a:spcBef>
+                  <a:spcAft>
+                    <a:spcPct val="0"/>
+                  </a:spcAft>
+                  <a:buClrTx/>
+                  <a:buSzTx/>
+                  <a:buFontTx/>
+                  <a:buNone/>
+                  <a:tabLst/>
+                </a:pPr>
+                <a:endParaRPr kumimoji="0" lang="ms-MY" altLang="en-US" sz="1100" b="0" i="0" u="none" strike="noStrike" cap="none" normalizeH="0" baseline="0" dirty="0">
+                  <a:ln>
+                    <a:noFill/>
+                  </a:ln>
+                  <a:solidFill>
+                    <a:schemeClr val="tx1"/>
+                  </a:solidFill>
+                  <a:effectLst/>
+                </a:endParaRPr>
+              </a:p>
+              <a:p>
+                <a:pPr eaLnBrk="0" fontAlgn="base" hangingPunct="0">
+                  <a:spcBef>
+                    <a:spcPct val="0"/>
+                  </a:spcBef>
+                  <a:spcAft>
+                    <a:spcPct val="0"/>
+                  </a:spcAft>
+                </a:pPr>
+                <a:r>
+                  <a:rPr kumimoji="0" lang="ms-MY" altLang="en-US" sz="1800" b="0" i="0" u="none" strike="noStrike" cap="none" normalizeH="0" baseline="0" dirty="0">
+                    <a:ln>
+                      <a:noFill/>
+                    </a:ln>
+                    <a:solidFill>
+                      <a:schemeClr val="tx1"/>
+                    </a:solidFill>
+                    <a:effectLst/>
+                    <a:latin typeface="Arial" panose="020B0604020202020204" pitchFamily="34" charset="0"/>
+                  </a:rPr>
+                  <a:t>9(a)</a:t>
+                </a:r>
+                <a:r>
+                  <a:rPr kumimoji="0" lang="ms-MY" altLang="en-US" sz="1800" b="0" i="0" u="none" strike="noStrike" cap="none" normalizeH="0" dirty="0">
+                    <a:ln>
+                      <a:noFill/>
+                    </a:ln>
+                    <a:solidFill>
+                      <a:schemeClr val="tx1"/>
+                    </a:solidFill>
+                    <a:effectLst/>
+                    <a:latin typeface="Arial" panose="020B0604020202020204" pitchFamily="34" charset="0"/>
+                  </a:rPr>
+                  <a:t>   </a:t>
+                </a:r>
+                <a:r>
+                  <a:rPr kumimoji="0" lang="ms-MY" altLang="en-US" sz="1800" b="0" i="0" u="none" strike="noStrike" cap="none" normalizeH="0" baseline="0" dirty="0">
+                    <a:ln>
+                      <a:noFill/>
+                    </a:ln>
+                    <a:solidFill>
+                      <a:schemeClr val="tx1"/>
+                    </a:solidFill>
+                    <a:effectLst/>
+                    <a:latin typeface="Arial" panose="020B0604020202020204" pitchFamily="34" charset="0"/>
+                  </a:rPr>
+                  <a:t>Calculate the binding energy per nucleon for </a:t>
+                </a:r>
+                <a14:m>
+                  <m:oMath xmlns:m="http://schemas.openxmlformats.org/officeDocument/2006/math">
+                    <m:sPre>
+                      <m:sPrePr>
+                        <m:ctrlPr>
+                          <a:rPr lang="en-MY" i="1">
+                            <a:latin typeface="Cambria Math" panose="02040503050406030204" pitchFamily="18" charset="0"/>
+                          </a:rPr>
+                        </m:ctrlPr>
+                      </m:sPrePr>
+                      <m:sub>
+                        <m:r>
+                          <a:rPr lang="en-MY" i="1">
+                            <a:latin typeface="Cambria Math" panose="02040503050406030204" pitchFamily="18" charset="0"/>
+                          </a:rPr>
+                          <m:t>116</m:t>
+                        </m:r>
+                      </m:sub>
+                      <m:sup>
+                        <m:r>
+                          <a:rPr lang="en-MY" i="1">
+                            <a:latin typeface="Cambria Math" panose="02040503050406030204" pitchFamily="18" charset="0"/>
+                          </a:rPr>
+                          <m:t>293</m:t>
+                        </m:r>
+                      </m:sup>
+                      <m:e>
+                        <m:r>
+                          <a:rPr lang="en-MY" i="1">
+                            <a:latin typeface="Cambria Math" panose="02040503050406030204" pitchFamily="18" charset="0"/>
+                          </a:rPr>
+                          <m:t>𝐿𝑣</m:t>
+                        </m:r>
+                      </m:e>
+                    </m:sPre>
+                  </m:oMath>
+                </a14:m>
+                <a:r>
+                  <a:rPr lang="en-MY" dirty="0"/>
+                  <a:t> </a:t>
+                </a:r>
+                <a:r>
+                  <a:rPr kumimoji="0" lang="ms-MY" altLang="en-US" sz="1800" b="0" i="0" u="none" strike="noStrike" cap="none" normalizeH="0" baseline="0" dirty="0">
+                    <a:ln>
+                      <a:noFill/>
+                    </a:ln>
+                    <a:solidFill>
+                      <a:schemeClr val="tx1"/>
+                    </a:solidFill>
+                    <a:effectLst/>
+                    <a:latin typeface="Arial" panose="020B0604020202020204" pitchFamily="34" charset="0"/>
+                    <a:ea typeface="Cambria Math" panose="02040503050406030204" pitchFamily="18" charset="0"/>
+                  </a:rPr>
+                  <a:t> </a:t>
+                </a:r>
+                <a:r>
+                  <a:rPr kumimoji="0" lang="ms-MY" altLang="en-US" sz="1800" b="0" i="0" u="none" strike="noStrike" cap="none" normalizeH="0" baseline="0" dirty="0">
+                    <a:ln>
+                      <a:noFill/>
+                    </a:ln>
+                    <a:solidFill>
+                      <a:schemeClr val="tx1"/>
+                    </a:solidFill>
+                    <a:effectLst/>
+                    <a:latin typeface="Arial" panose="020B0604020202020204" pitchFamily="34" charset="0"/>
+                  </a:rPr>
+                  <a:t>in </a:t>
+                </a:r>
+                <a:r>
+                  <a:rPr kumimoji="0" lang="ms-MY" altLang="en-US" sz="1800" b="0" i="1" u="none" strike="noStrike" cap="none" normalizeH="0" baseline="0" dirty="0">
+                    <a:ln>
+                      <a:noFill/>
+                    </a:ln>
+                    <a:solidFill>
+                      <a:schemeClr val="tx1"/>
+                    </a:solidFill>
+                    <a:effectLst/>
+                    <a:latin typeface="Arial" panose="020B0604020202020204" pitchFamily="34" charset="0"/>
+                  </a:rPr>
+                  <a:t>MeV per nucleon</a:t>
+                </a:r>
+                <a:r>
+                  <a:rPr kumimoji="0" lang="ms-MY" altLang="en-US" sz="1800" b="0" i="0" u="none" strike="noStrike" cap="none" normalizeH="0" baseline="0" dirty="0">
+                    <a:ln>
+                      <a:noFill/>
+                    </a:ln>
+                    <a:solidFill>
+                      <a:schemeClr val="tx1"/>
+                    </a:solidFill>
+                    <a:effectLst/>
+                    <a:latin typeface="Arial" panose="020B0604020202020204" pitchFamily="34" charset="0"/>
+                  </a:rPr>
+                  <a:t>. </a:t>
+                </a:r>
+                <a:br>
+                  <a:rPr kumimoji="0" lang="ms-MY" altLang="en-US" sz="1800" b="0" i="0" u="none" strike="noStrike" cap="none" normalizeH="0" baseline="0" dirty="0">
+                    <a:ln>
+                      <a:noFill/>
+                    </a:ln>
+                    <a:solidFill>
+                      <a:schemeClr val="tx1"/>
+                    </a:solidFill>
+                    <a:effectLst/>
+                    <a:latin typeface="Arial" panose="020B0604020202020204" pitchFamily="34" charset="0"/>
+                  </a:rPr>
+                </a:br>
+                <a:r>
+                  <a:rPr kumimoji="0" lang="ms-MY" altLang="en-US" sz="1800" b="0" i="0" u="none" strike="noStrike" cap="none" normalizeH="0" baseline="0" dirty="0">
+                    <a:ln>
+                      <a:noFill/>
+                    </a:ln>
+                    <a:solidFill>
+                      <a:schemeClr val="tx1"/>
+                    </a:solidFill>
+                    <a:effectLst/>
+                    <a:latin typeface="Arial" panose="020B0604020202020204" pitchFamily="34" charset="0"/>
+                  </a:rPr>
+                  <a:t>(Given atomic mass of </a:t>
+                </a:r>
+                <a14:m>
+                  <m:oMath xmlns:m="http://schemas.openxmlformats.org/officeDocument/2006/math">
+                    <m:sPre>
+                      <m:sPrePr>
+                        <m:ctrlPr>
+                          <a:rPr lang="en-MY" i="1">
+                            <a:latin typeface="Cambria Math" panose="02040503050406030204" pitchFamily="18" charset="0"/>
+                          </a:rPr>
+                        </m:ctrlPr>
+                      </m:sPrePr>
+                      <m:sub>
+                        <m:r>
+                          <a:rPr lang="en-MY" i="1">
+                            <a:latin typeface="Cambria Math" panose="02040503050406030204" pitchFamily="18" charset="0"/>
+                          </a:rPr>
+                          <m:t>116</m:t>
+                        </m:r>
+                      </m:sub>
+                      <m:sup>
+                        <m:r>
+                          <a:rPr lang="en-MY" i="1">
+                            <a:latin typeface="Cambria Math" panose="02040503050406030204" pitchFamily="18" charset="0"/>
+                          </a:rPr>
+                          <m:t>293</m:t>
+                        </m:r>
+                      </m:sup>
+                      <m:e>
+                        <m:r>
+                          <a:rPr lang="en-MY" i="1">
+                            <a:latin typeface="Cambria Math" panose="02040503050406030204" pitchFamily="18" charset="0"/>
+                          </a:rPr>
+                          <m:t>𝐿𝑣</m:t>
+                        </m:r>
+                      </m:e>
+                    </m:sPre>
+                  </m:oMath>
+                </a14:m>
+                <a:r>
+                  <a:rPr lang="en-MY" dirty="0"/>
+                  <a:t> </a:t>
+                </a:r>
+                <a:r>
+                  <a:rPr kumimoji="0" lang="ms-MY" altLang="en-US" sz="1800" b="0" i="0" u="none" strike="noStrike" cap="none" normalizeH="0" baseline="0" dirty="0">
+                    <a:ln>
+                      <a:noFill/>
+                    </a:ln>
+                    <a:solidFill>
+                      <a:schemeClr val="tx1"/>
+                    </a:solidFill>
+                    <a:effectLst/>
+                    <a:latin typeface="Arial" panose="020B0604020202020204" pitchFamily="34" charset="0"/>
+                    <a:ea typeface="Cambria Math" panose="02040503050406030204" pitchFamily="18" charset="0"/>
+                  </a:rPr>
+                  <a:t> </a:t>
+                </a:r>
+                <a:r>
+                  <a:rPr kumimoji="0" lang="ms-MY" altLang="en-US" sz="1800" b="0" i="0" u="none" strike="noStrike" cap="none" normalizeH="0" baseline="0" dirty="0">
+                    <a:ln>
+                      <a:noFill/>
+                    </a:ln>
+                    <a:solidFill>
+                      <a:schemeClr val="tx1"/>
+                    </a:solidFill>
+                    <a:effectLst/>
+                    <a:latin typeface="Arial" panose="020B0604020202020204" pitchFamily="34" charset="0"/>
+                  </a:rPr>
+                  <a:t>is 293.205 u)							[3</a:t>
+                </a:r>
+                <a:r>
+                  <a:rPr kumimoji="0" lang="ms-MY" altLang="en-US" sz="1800" b="0" i="0" u="none" strike="noStrike" cap="none" normalizeH="0" dirty="0">
+                    <a:ln>
+                      <a:noFill/>
+                    </a:ln>
+                    <a:solidFill>
+                      <a:schemeClr val="tx1"/>
+                    </a:solidFill>
+                    <a:effectLst/>
+                    <a:latin typeface="Arial" panose="020B0604020202020204" pitchFamily="34" charset="0"/>
+                  </a:rPr>
+                  <a:t> marks]</a:t>
+                </a:r>
+                <a:endParaRPr kumimoji="0" lang="ms-MY" altLang="en-US" sz="1800" b="0" i="0" u="none" strike="noStrike" cap="none" normalizeH="0" baseline="0" dirty="0">
+                  <a:ln>
+                    <a:noFill/>
+                  </a:ln>
+                  <a:solidFill>
+                    <a:schemeClr val="tx1"/>
+                  </a:solidFill>
+                  <a:effectLst/>
+                  <a:latin typeface="Arial" panose="020B0604020202020204" pitchFamily="34" charset="0"/>
+                </a:endParaRPr>
+              </a:p>
+            </p:txBody>
+          </p:sp>
+        </mc:Choice>
+        <mc:Fallback xmlns="">
+          <p:sp>
+            <p:nvSpPr>
+              <p:cNvPr id="21" name="Rectangle 20">
+                <a:extLst>
+                  <a:ext uri="{FF2B5EF4-FFF2-40B4-BE49-F238E27FC236}">
+                    <a16:creationId xmlns:a16="http://schemas.microsoft.com/office/drawing/2014/main" id="{39E855D1-5027-E12C-ADD5-BC004238E2A5}"/>
+                  </a:ext>
+                </a:extLst>
+              </p:cNvPr>
+              <p:cNvSpPr>
+                <a:spLocks noRot="1" noChangeAspect="1" noMove="1" noResize="1" noEditPoints="1" noAdjustHandles="1" noChangeArrowheads="1" noChangeShapeType="1" noTextEdit="1"/>
+              </p:cNvSpPr>
+              <p:nvPr/>
+            </p:nvSpPr>
+            <p:spPr bwMode="auto">
+              <a:xfrm>
+                <a:off x="309716" y="516350"/>
+                <a:ext cx="11297265" cy="856645"/>
+              </a:xfrm>
+              <a:prstGeom prst="rect">
+                <a:avLst/>
+              </a:prstGeom>
+              <a:blipFill>
+                <a:blip r:embed="rId2"/>
+                <a:stretch>
+                  <a:fillRect l="-486" b="-10000"/>
+                </a:stretch>
+              </a:blipFill>
+              <a:ln>
+                <a:noFill/>
+              </a:ln>
+              <a:effectLst/>
+              <a:extLst>
+                <a:ext uri="{909E8E84-426E-40DD-AFC4-6F175D3DCCD1}">
+                  <a14:hiddenFill xmlns:a14="http://schemas.microsoft.com/office/drawing/2010/main">
+                    <a:solidFill>
+                      <a:schemeClr val="accent1"/>
+                    </a:solidFill>
+                  </a14:hiddenFill>
+                </a:ext>
+                <a:ext uri="{91240B29-F687-4F45-9708-019B960494DF}">
+                  <a14:hiddenLine xmlns:a14="http://schemas.microsoft.com/office/drawing/2010/main" w="9525">
+                    <a:solidFill>
+                      <a:schemeClr val="tx1"/>
+                    </a:solidFill>
+                    <a:miter lim="800000"/>
+                    <a:headEnd/>
+                    <a:tailEnd/>
+                  </a14:hiddenLine>
+                </a:ext>
+                <a:ext uri="{AF507438-7753-43E0-B8FC-AC1667EBCBE1}">
+                  <a14:hiddenEffects xmlns:a14="http://schemas.microsoft.com/office/drawing/2010/main">
+                    <a:effectLst>
+                      <a:outerShdw dist="35921" dir="2700000" algn="ctr" rotWithShape="0">
+                        <a:schemeClr val="bg2"/>
+                      </a:outerShdw>
+                    </a:effectLst>
+                  </a14:hiddenEffects>
+                </a:ext>
+              </a:extLst>
+            </p:spPr>
+            <p:txBody>
+              <a:bodyPr/>
+              <a:lstStyle/>
+              <a:p>
+                <a:r>
+                  <a:rPr lang="en-MY">
+                    <a:noFill/>
+                  </a:rPr>
+                  <a:t> </a:t>
+                </a:r>
+              </a:p>
+            </p:txBody>
+          </p:sp>
+        </mc:Fallback>
+      </mc:AlternateContent>
+      <mc:AlternateContent xmlns:mc="http://schemas.openxmlformats.org/markup-compatibility/2006" xmlns:a14="http://schemas.microsoft.com/office/drawing/2010/main">
+        <mc:Choice Requires="a14">
+          <p:sp>
+            <p:nvSpPr>
+              <p:cNvPr id="25" name="Rectangle 24">
+                <a:extLst>
+                  <a:ext uri="{FF2B5EF4-FFF2-40B4-BE49-F238E27FC236}">
+                    <a16:creationId xmlns:a16="http://schemas.microsoft.com/office/drawing/2014/main" id="{E3AB7031-FBF1-E02D-58EE-63A0255D2128}"/>
+                  </a:ext>
+                </a:extLst>
+              </p:cNvPr>
+              <p:cNvSpPr>
+                <a:spLocks noChangeArrowheads="1"/>
+              </p:cNvSpPr>
+              <p:nvPr/>
+            </p:nvSpPr>
+            <p:spPr bwMode="auto">
+              <a:xfrm>
+                <a:off x="309716" y="1384296"/>
+                <a:ext cx="11405420" cy="1658403"/>
+              </a:xfrm>
+              <a:prstGeom prst="rect">
+                <a:avLst/>
+              </a:prstGeom>
+              <a:noFill/>
+              <a:ln>
+                <a:noFill/>
+              </a:ln>
+              <a:effectLst/>
+              <a:extLst>
+                <a:ext uri="{909E8E84-426E-40DD-AFC4-6F175D3DCCD1}">
+                  <a14:hiddenFill>
+                    <a:solidFill>
+                      <a:schemeClr val="accent1"/>
+                    </a:solidFill>
+                  </a14:hiddenFill>
+                </a:ext>
+                <a:ext uri="{91240B29-F687-4F45-9708-019B960494DF}">
+                  <a14:hiddenLine w="9525">
+                    <a:solidFill>
+                      <a:schemeClr val="tx1"/>
+                    </a:solidFill>
+                    <a:miter lim="800000"/>
+                    <a:headEnd/>
+                    <a:tailEnd/>
+                  </a14:hiddenLine>
+                </a:ext>
+                <a:ext uri="{AF507438-7753-43E0-B8FC-AC1667EBCBE1}">
+                  <a14:hiddenEffects>
+                    <a:effectLst>
+                      <a:outerShdw dist="35921" dir="2700000" algn="ctr" rotWithShape="0">
+                        <a:schemeClr val="bg2"/>
+                      </a:outerShdw>
+                    </a:effectLst>
+                  </a14:hiddenEffects>
+                </a:ext>
+              </a:extLst>
+            </p:spPr>
+            <p:txBody>
+              <a:bodyPr vert="horz" wrap="square" lIns="91440" tIns="45720" rIns="91440" bIns="45720" numCol="1" anchor="ctr" anchorCtr="0" compatLnSpc="1">
+                <a:prstTxWarp prst="textNoShape">
+                  <a:avLst/>
+                </a:prstTxWarp>
+                <a:spAutoFit/>
+              </a:bodyPr>
+              <a:lstStyle>
+                <a:lvl1pPr eaLnBrk="0" fontAlgn="base" hangingPunct="0">
+                  <a:spcBef>
+                    <a:spcPct val="0"/>
+                  </a:spcBef>
+                  <a:spcAft>
+                    <a:spcPct val="0"/>
+                  </a:spcAft>
+                  <a:tabLst>
+                    <a:tab pos="1316038" algn="l"/>
+                  </a:tabLst>
+                  <a:defRPr>
+                    <a:solidFill>
+                      <a:schemeClr val="tx1"/>
+                    </a:solidFill>
+                    <a:latin typeface="Arial" panose="020B0604020202020204" pitchFamily="34" charset="0"/>
+                  </a:defRPr>
+                </a:lvl1pPr>
+                <a:lvl2pPr eaLnBrk="0" fontAlgn="base" hangingPunct="0">
+                  <a:spcBef>
+                    <a:spcPct val="0"/>
+                  </a:spcBef>
+                  <a:spcAft>
+                    <a:spcPct val="0"/>
+                  </a:spcAft>
+                  <a:tabLst>
+                    <a:tab pos="1316038" algn="l"/>
+                  </a:tabLst>
+                  <a:defRPr>
+                    <a:solidFill>
+                      <a:schemeClr val="tx1"/>
+                    </a:solidFill>
+                    <a:latin typeface="Arial" panose="020B0604020202020204" pitchFamily="34" charset="0"/>
+                  </a:defRPr>
+                </a:lvl2pPr>
+                <a:lvl3pPr eaLnBrk="0" fontAlgn="base" hangingPunct="0">
+                  <a:spcBef>
+                    <a:spcPct val="0"/>
+                  </a:spcBef>
+                  <a:spcAft>
+                    <a:spcPct val="0"/>
+                  </a:spcAft>
+                  <a:tabLst>
+                    <a:tab pos="1316038" algn="l"/>
+                  </a:tabLst>
+                  <a:defRPr>
+                    <a:solidFill>
+                      <a:schemeClr val="tx1"/>
+                    </a:solidFill>
+                    <a:latin typeface="Arial" panose="020B0604020202020204" pitchFamily="34" charset="0"/>
+                  </a:defRPr>
+                </a:lvl3pPr>
+                <a:lvl4pPr eaLnBrk="0" fontAlgn="base" hangingPunct="0">
+                  <a:spcBef>
+                    <a:spcPct val="0"/>
+                  </a:spcBef>
+                  <a:spcAft>
+                    <a:spcPct val="0"/>
+                  </a:spcAft>
+                  <a:tabLst>
+                    <a:tab pos="1316038" algn="l"/>
+                  </a:tabLst>
+                  <a:defRPr>
+                    <a:solidFill>
+                      <a:schemeClr val="tx1"/>
+                    </a:solidFill>
+                    <a:latin typeface="Arial" panose="020B0604020202020204" pitchFamily="34" charset="0"/>
+                  </a:defRPr>
+                </a:lvl4pPr>
+                <a:lvl5pPr eaLnBrk="0" fontAlgn="base" hangingPunct="0">
+                  <a:spcBef>
+                    <a:spcPct val="0"/>
+                  </a:spcBef>
+                  <a:spcAft>
+                    <a:spcPct val="0"/>
+                  </a:spcAft>
+                  <a:tabLst>
+                    <a:tab pos="1316038" algn="l"/>
+                  </a:tabLst>
+                  <a:defRPr>
+                    <a:solidFill>
+                      <a:schemeClr val="tx1"/>
+                    </a:solidFill>
+                    <a:latin typeface="Arial" panose="020B0604020202020204" pitchFamily="34" charset="0"/>
+                  </a:defRPr>
+                </a:lvl5pPr>
+                <a:lvl6pPr eaLnBrk="0" fontAlgn="base" hangingPunct="0">
+                  <a:spcBef>
+                    <a:spcPct val="0"/>
+                  </a:spcBef>
+                  <a:spcAft>
+                    <a:spcPct val="0"/>
+                  </a:spcAft>
+                  <a:tabLst>
+                    <a:tab pos="1316038" algn="l"/>
+                  </a:tabLst>
+                  <a:defRPr>
+                    <a:solidFill>
+                      <a:schemeClr val="tx1"/>
+                    </a:solidFill>
+                    <a:latin typeface="Arial" panose="020B0604020202020204" pitchFamily="34" charset="0"/>
+                  </a:defRPr>
+                </a:lvl6pPr>
+                <a:lvl7pPr eaLnBrk="0" fontAlgn="base" hangingPunct="0">
+                  <a:spcBef>
+                    <a:spcPct val="0"/>
+                  </a:spcBef>
+                  <a:spcAft>
+                    <a:spcPct val="0"/>
+                  </a:spcAft>
+                  <a:tabLst>
+                    <a:tab pos="1316038" algn="l"/>
+                  </a:tabLst>
+                  <a:defRPr>
+                    <a:solidFill>
+                      <a:schemeClr val="tx1"/>
+                    </a:solidFill>
+                    <a:latin typeface="Arial" panose="020B0604020202020204" pitchFamily="34" charset="0"/>
+                  </a:defRPr>
+                </a:lvl7pPr>
+                <a:lvl8pPr eaLnBrk="0" fontAlgn="base" hangingPunct="0">
+                  <a:spcBef>
+                    <a:spcPct val="0"/>
+                  </a:spcBef>
+                  <a:spcAft>
+                    <a:spcPct val="0"/>
+                  </a:spcAft>
+                  <a:tabLst>
+                    <a:tab pos="1316038" algn="l"/>
+                  </a:tabLst>
+                  <a:defRPr>
+                    <a:solidFill>
+                      <a:schemeClr val="tx1"/>
+                    </a:solidFill>
+                    <a:latin typeface="Arial" panose="020B0604020202020204" pitchFamily="34" charset="0"/>
+                  </a:defRPr>
+                </a:lvl8pPr>
+                <a:lvl9pPr eaLnBrk="0" fontAlgn="base" hangingPunct="0">
+                  <a:spcBef>
+                    <a:spcPct val="0"/>
+                  </a:spcBef>
+                  <a:spcAft>
+                    <a:spcPct val="0"/>
+                  </a:spcAft>
+                  <a:tabLst>
+                    <a:tab pos="1316038" algn="l"/>
+                  </a:tabLst>
+                  <a:defRPr>
+                    <a:solidFill>
+                      <a:schemeClr val="tx1"/>
+                    </a:solidFill>
+                    <a:latin typeface="Arial" panose="020B0604020202020204" pitchFamily="34" charset="0"/>
+                  </a:defRPr>
+                </a:lvl9pPr>
+              </a:lstStyle>
+              <a:p>
+                <a:pPr marL="0" marR="0" lvl="0" indent="0" algn="l" defTabSz="914400" rtl="0" eaLnBrk="0" fontAlgn="base" latinLnBrk="0" hangingPunct="0">
+                  <a:lnSpc>
+                    <a:spcPct val="100000"/>
+                  </a:lnSpc>
+                  <a:spcBef>
+                    <a:spcPct val="0"/>
+                  </a:spcBef>
+                  <a:spcAft>
+                    <a:spcPct val="0"/>
+                  </a:spcAft>
+                  <a:buClrTx/>
+                  <a:buSzTx/>
+                  <a:buFontTx/>
+                  <a:buNone/>
+                  <a:tabLst>
+                    <a:tab pos="1316038" algn="l"/>
+                  </a:tabLst>
+                </a:pPr>
+                <a:endParaRPr kumimoji="0" lang="ms-MY" altLang="en-US" sz="1100" b="0" i="0" u="none" strike="noStrike" cap="none" normalizeH="0" baseline="0" dirty="0">
+                  <a:ln>
+                    <a:noFill/>
+                  </a:ln>
+                  <a:solidFill>
+                    <a:schemeClr val="tx1"/>
+                  </a:solidFill>
+                  <a:effectLst/>
+                </a:endParaRPr>
+              </a:p>
+              <a:p>
+                <a:r>
+                  <a:rPr lang="ms-MY" altLang="en-US" dirty="0"/>
+                  <a:t>(b)   The half-life of </a:t>
+                </a:r>
+                <a14:m>
+                  <m:oMath xmlns:m="http://schemas.openxmlformats.org/officeDocument/2006/math">
+                    <m:sPre>
+                      <m:sPrePr>
+                        <m:ctrlPr>
+                          <a:rPr lang="en-MY" i="1" smtClean="0">
+                            <a:latin typeface="Cambria Math" panose="02040503050406030204" pitchFamily="18" charset="0"/>
+                          </a:rPr>
+                        </m:ctrlPr>
+                      </m:sPrePr>
+                      <m:sub>
+                        <m:r>
+                          <a:rPr lang="en-US" b="0" i="1" smtClean="0">
+                            <a:latin typeface="Cambria Math" panose="02040503050406030204" pitchFamily="18" charset="0"/>
+                          </a:rPr>
+                          <m:t>27</m:t>
+                        </m:r>
+                      </m:sub>
+                      <m:sup>
+                        <m:r>
+                          <a:rPr lang="en-US" b="0" i="1" smtClean="0">
+                            <a:latin typeface="Cambria Math" panose="02040503050406030204" pitchFamily="18" charset="0"/>
+                          </a:rPr>
+                          <m:t>60</m:t>
+                        </m:r>
+                      </m:sup>
+                      <m:e>
+                        <m:r>
+                          <a:rPr lang="en-US" b="0" i="1" smtClean="0">
+                            <a:latin typeface="Cambria Math" panose="02040503050406030204" pitchFamily="18" charset="0"/>
+                          </a:rPr>
+                          <m:t>𝐶𝑜</m:t>
+                        </m:r>
+                      </m:e>
+                    </m:sPre>
+                  </m:oMath>
+                </a14:m>
+                <a:r>
+                  <a:rPr lang="en-MY" dirty="0"/>
+                  <a:t> </a:t>
+                </a:r>
+                <a:r>
+                  <a:rPr lang="ms-MY" altLang="en-US" dirty="0"/>
+                  <a:t> is 5.26 years. Calculate the</a:t>
+                </a:r>
+              </a:p>
+              <a:p>
+                <a:pPr marL="857250" marR="0" lvl="1" indent="-400050" algn="l" defTabSz="914400" rtl="0" eaLnBrk="0" fontAlgn="base" latinLnBrk="0" hangingPunct="0">
+                  <a:lnSpc>
+                    <a:spcPct val="100000"/>
+                  </a:lnSpc>
+                  <a:spcBef>
+                    <a:spcPct val="0"/>
+                  </a:spcBef>
+                  <a:spcAft>
+                    <a:spcPct val="0"/>
+                  </a:spcAft>
+                  <a:buClrTx/>
+                  <a:buSzPct val="100000"/>
+                  <a:buAutoNum type="romanLcParenBoth"/>
+                  <a:tabLst>
+                    <a:tab pos="1316038" algn="l"/>
+                  </a:tabLst>
+                </a:pPr>
+                <a:r>
+                  <a:rPr lang="ms-MY" altLang="en-US" dirty="0"/>
+                  <a:t>decay constant of this atom								[2 marks]							</a:t>
+                </a:r>
+              </a:p>
+              <a:p>
+                <a:pPr marL="857250" lvl="1" indent="-400050">
+                  <a:buSzPct val="100000"/>
+                  <a:buAutoNum type="romanLcParenBoth"/>
+                </a:pPr>
+                <a:r>
+                  <a:rPr lang="ms-MY" altLang="en-US" dirty="0"/>
+                  <a:t>Activity of 1.00 g of </a:t>
+                </a:r>
+                <a14:m>
+                  <m:oMath xmlns:m="http://schemas.openxmlformats.org/officeDocument/2006/math">
+                    <m:sPre>
+                      <m:sPrePr>
+                        <m:ctrlPr>
+                          <a:rPr lang="en-MY" i="1" smtClean="0">
+                            <a:latin typeface="Cambria Math" panose="02040503050406030204" pitchFamily="18" charset="0"/>
+                          </a:rPr>
+                        </m:ctrlPr>
+                      </m:sPrePr>
+                      <m:sub>
+                        <m:r>
+                          <a:rPr lang="en-US" b="0" i="1" smtClean="0">
+                            <a:latin typeface="Cambria Math" panose="02040503050406030204" pitchFamily="18" charset="0"/>
+                          </a:rPr>
+                          <m:t>27</m:t>
+                        </m:r>
+                      </m:sub>
+                      <m:sup>
+                        <m:r>
+                          <a:rPr lang="en-US" b="0" i="1" smtClean="0">
+                            <a:latin typeface="Cambria Math" panose="02040503050406030204" pitchFamily="18" charset="0"/>
+                          </a:rPr>
+                          <m:t>60</m:t>
+                        </m:r>
+                      </m:sup>
+                      <m:e>
+                        <m:r>
+                          <a:rPr lang="en-US" b="0" i="1" smtClean="0">
+                            <a:latin typeface="Cambria Math" panose="02040503050406030204" pitchFamily="18" charset="0"/>
+                          </a:rPr>
+                          <m:t>𝐶𝑜</m:t>
+                        </m:r>
+                      </m:e>
+                    </m:sPre>
+                  </m:oMath>
+                </a14:m>
+                <a:r>
+                  <a:rPr lang="en-MY" dirty="0"/>
+                  <a:t> 								[2 marks]</a:t>
+                </a:r>
+                <a:endParaRPr lang="ms-MY" altLang="en-US" dirty="0"/>
+              </a:p>
+              <a:p>
+                <a:pPr marL="0" marR="0" lvl="0" indent="0" algn="l" defTabSz="914400" rtl="0" eaLnBrk="0" fontAlgn="base" latinLnBrk="0" hangingPunct="0">
+                  <a:lnSpc>
+                    <a:spcPct val="100000"/>
+                  </a:lnSpc>
+                  <a:spcBef>
+                    <a:spcPct val="0"/>
+                  </a:spcBef>
+                  <a:spcAft>
+                    <a:spcPct val="0"/>
+                  </a:spcAft>
+                  <a:buClrTx/>
+                  <a:buSzTx/>
+                  <a:buFontTx/>
+                  <a:buNone/>
+                  <a:tabLst>
+                    <a:tab pos="1316038" algn="l"/>
+                  </a:tabLst>
+                </a:pPr>
+                <a:endParaRPr kumimoji="0" lang="ms-MY" altLang="en-US" sz="1800" b="0" i="0" u="none" strike="noStrike" cap="none" normalizeH="0" baseline="0" dirty="0">
+                  <a:ln>
+                    <a:noFill/>
+                  </a:ln>
+                  <a:solidFill>
+                    <a:schemeClr val="tx1"/>
+                  </a:solidFill>
+                  <a:effectLst/>
+                  <a:latin typeface="Arial" panose="020B0604020202020204" pitchFamily="34" charset="0"/>
+                </a:endParaRPr>
+              </a:p>
+            </p:txBody>
+          </p:sp>
+        </mc:Choice>
+        <mc:Fallback xmlns="">
+          <p:sp>
+            <p:nvSpPr>
+              <p:cNvPr id="25" name="Rectangle 24">
+                <a:extLst>
+                  <a:ext uri="{FF2B5EF4-FFF2-40B4-BE49-F238E27FC236}">
+                    <a16:creationId xmlns:a16="http://schemas.microsoft.com/office/drawing/2014/main" id="{E3AB7031-FBF1-E02D-58EE-63A0255D2128}"/>
+                  </a:ext>
+                </a:extLst>
+              </p:cNvPr>
+              <p:cNvSpPr>
+                <a:spLocks noRot="1" noChangeAspect="1" noMove="1" noResize="1" noEditPoints="1" noAdjustHandles="1" noChangeArrowheads="1" noChangeShapeType="1" noTextEdit="1"/>
+              </p:cNvSpPr>
+              <p:nvPr/>
+            </p:nvSpPr>
+            <p:spPr bwMode="auto">
+              <a:xfrm>
+                <a:off x="309716" y="1384296"/>
+                <a:ext cx="11405420" cy="1658403"/>
+              </a:xfrm>
+              <a:prstGeom prst="rect">
+                <a:avLst/>
+              </a:prstGeom>
+              <a:blipFill>
+                <a:blip r:embed="rId3"/>
+                <a:stretch>
+                  <a:fillRect l="-481"/>
+                </a:stretch>
+              </a:blipFill>
+              <a:ln>
+                <a:noFill/>
+              </a:ln>
+              <a:effectLst/>
+              <a:extLst>
+                <a:ext uri="{909E8E84-426E-40DD-AFC4-6F175D3DCCD1}">
+                  <a14:hiddenFill xmlns:a14="http://schemas.microsoft.com/office/drawing/2010/main">
+                    <a:solidFill>
+                      <a:schemeClr val="accent1"/>
+                    </a:solidFill>
+                  </a14:hiddenFill>
+                </a:ext>
+                <a:ext uri="{91240B29-F687-4F45-9708-019B960494DF}">
+                  <a14:hiddenLine xmlns:a14="http://schemas.microsoft.com/office/drawing/2010/main" w="9525">
+                    <a:solidFill>
+                      <a:schemeClr val="tx1"/>
+                    </a:solidFill>
+                    <a:miter lim="800000"/>
+                    <a:headEnd/>
+                    <a:tailEnd/>
+                  </a14:hiddenLine>
+                </a:ext>
+                <a:ext uri="{AF507438-7753-43E0-B8FC-AC1667EBCBE1}">
+                  <a14:hiddenEffects xmlns:a14="http://schemas.microsoft.com/office/drawing/2010/main">
+                    <a:effectLst>
+                      <a:outerShdw dist="35921" dir="2700000" algn="ctr" rotWithShape="0">
+                        <a:schemeClr val="bg2"/>
+                      </a:outerShdw>
+                    </a:effectLst>
+                  </a14:hiddenEffects>
+                </a:ext>
+              </a:extLst>
+            </p:spPr>
+            <p:txBody>
+              <a:bodyPr/>
+              <a:lstStyle/>
+              <a:p>
+                <a:r>
+                  <a:rPr lang="en-MY">
+                    <a:noFill/>
+                  </a:rPr>
+                  <a:t> </a:t>
+                </a:r>
+              </a:p>
+            </p:txBody>
+          </p:sp>
+        </mc:Fallback>
+      </mc:AlternateContent>
+      <p:pic>
+        <p:nvPicPr>
+          <p:cNvPr id="28" name="Picture 27">
+            <a:extLst>
+              <a:ext uri="{FF2B5EF4-FFF2-40B4-BE49-F238E27FC236}">
+                <a16:creationId xmlns:a16="http://schemas.microsoft.com/office/drawing/2014/main" id="{C65C4184-8470-0CD6-8A2F-07EAF8F5AB2B}"/>
+              </a:ext>
+            </a:extLst>
+          </p:cNvPr>
+          <p:cNvPicPr>
+            <a:picLocks noChangeAspect="1"/>
+          </p:cNvPicPr>
+          <p:nvPr/>
+        </p:nvPicPr>
+        <p:blipFill>
+          <a:blip r:embed="rId4"/>
+          <a:stretch>
+            <a:fillRect/>
+          </a:stretch>
+        </p:blipFill>
+        <p:spPr>
+          <a:xfrm>
+            <a:off x="8666711" y="5266491"/>
+            <a:ext cx="3048425" cy="762106"/>
+          </a:xfrm>
+          <a:prstGeom prst="rect">
+            <a:avLst/>
+          </a:prstGeom>
+        </p:spPr>
+      </p:pic>
+    </p:spTree>
+    <p:extLst>
+      <p:ext uri="{BB962C8B-B14F-4D97-AF65-F5344CB8AC3E}">
+        <p14:creationId xmlns:p14="http://schemas.microsoft.com/office/powerpoint/2010/main" val="3618428581"/>
       </p:ext>
     </p:extLst>
   </p:cSld>
